--- a/project_34_road_damage/presentations/project_presentation.pptx
+++ b/project_34_road_damage/presentations/project_presentation.pptx
@@ -13,6 +13,13 @@
     <p:sldId id="261" r:id="rId12"/>
     <p:sldId id="262" r:id="rId13"/>
     <p:sldId id="263" r:id="rId14"/>
+    <p:sldId id="264" r:id="rId15"/>
+    <p:sldId id="265" r:id="rId16"/>
+    <p:sldId id="266" r:id="rId17"/>
+    <p:sldId id="267" r:id="rId18"/>
+    <p:sldId id="268" r:id="rId19"/>
+    <p:sldId id="269" r:id="rId20"/>
+    <p:sldId id="270" r:id="rId21"/>
   </p:sldIdLst>
   <p:sldSz cx="12191695" cy="6858000" type="screen4x3"/>
   <p:notesSz cx="6858000" cy="9144000"/>
@@ -3110,7 +3117,7 @@
             <a:avLst/>
           </a:prstGeom>
           <a:solidFill>
-            <a:srgbClr val="0F172A"/>
+            <a:srgbClr val="070D18"/>
           </a:solidFill>
           <a:ln>
             <a:noFill/>
@@ -3146,8 +3153,8 @@
         </p:nvSpPr>
         <p:spPr>
           <a:xfrm>
-            <a:off x="1097280" y="1645920"/>
-            <a:ext cx="10058400" cy="3474720"/>
+            <a:off x="914400" y="1645920"/>
+            <a:ext cx="10362895" cy="3657600"/>
           </a:xfrm>
           <a:prstGeom prst="rect">
             <a:avLst/>
@@ -3161,44 +3168,2088 @@
           <a:lstStyle/>
           <a:p>
             <a:pPr>
+              <a:defRPr sz="3200" b="1">
+                <a:solidFill>
+                  <a:srgbClr val="F8FAFC"/>
+                </a:solidFill>
+              </a:defRPr>
+            </a:pPr>
+            <a:r>
+              <a:t>PROJECT-034: AI-BASED ROAD DAMAGE DETECTION AND SEVERITY CLASSIFICATION</a:t>
+            </a:r>
+          </a:p>
+          <a:p>
+            <a:pPr>
+              <a:defRPr sz="1800">
+                <a:solidFill>
+                  <a:srgbClr val="F59E0B"/>
+                </a:solidFill>
+              </a:defRPr>
+            </a:pPr>
+            <a:r>
+              <a:t>Automated Pavement Distress Localization, Severity Indexing, and Municipal Work Order Optimization Using YOLO &amp; Deep Residual Neural Networks</a:t>
+            </a:r>
+          </a:p>
+          <a:p>
+            <a:br/>
+            <a:pPr>
+              <a:defRPr sz="1300">
+                <a:solidFill>
+                  <a:srgbClr val="94A3B8"/>
+                </a:solidFill>
+              </a:defRPr>
+            </a:pPr>
+            <a:r>
+              <a:t>Capstone Engineering System Portfolio • Port 5034 • Autonomous PyTorch 2.x Inference Engine</a:t>
+            </a:r>
+          </a:p>
+        </p:txBody>
+      </p:sp>
+    </p:spTree>
+  </p:cSld>
+  <p:clrMapOvr>
+    <a:masterClrMapping/>
+  </p:clrMapOvr>
+</p:sld>
+</file>
+
+<file path=ppt/slides/slide10.xml><?xml version="1.0" encoding="utf-8"?>
+<p:sld xmlns:a="http://schemas.openxmlformats.org/drawingml/2006/main" xmlns:p="http://schemas.openxmlformats.org/presentationml/2006/main" xmlns:r="http://schemas.openxmlformats.org/officeDocument/2006/relationships">
+  <p:cSld>
+    <p:spTree>
+      <p:nvGrpSpPr>
+        <p:cNvPr id="1" name=""/>
+        <p:cNvGrpSpPr/>
+        <p:nvPr/>
+      </p:nvGrpSpPr>
+      <p:grpSpPr/>
+      <p:sp>
+        <p:nvSpPr>
+          <p:cNvPr id="2" name="Rectangle 1"/>
+          <p:cNvSpPr/>
+          <p:nvPr/>
+        </p:nvSpPr>
+        <p:spPr>
+          <a:xfrm>
+            <a:off x="0" y="0"/>
+            <a:ext cx="12191695" cy="6858000"/>
+          </a:xfrm>
+          <a:prstGeom prst="rect">
+            <a:avLst/>
+          </a:prstGeom>
+          <a:solidFill>
+            <a:srgbClr val="070D18"/>
+          </a:solidFill>
+          <a:ln>
+            <a:noFill/>
+          </a:ln>
+        </p:spPr>
+        <p:style>
+          <a:lnRef idx="1">
+            <a:schemeClr val="accent1"/>
+          </a:lnRef>
+          <a:fillRef idx="3">
+            <a:schemeClr val="accent1"/>
+          </a:fillRef>
+          <a:effectRef idx="2">
+            <a:schemeClr val="accent1"/>
+          </a:effectRef>
+          <a:fontRef idx="minor">
+            <a:schemeClr val="lt1"/>
+          </a:fontRef>
+        </p:style>
+        <p:txBody>
+          <a:bodyPr rtlCol="0" anchor="ctr"/>
+          <a:lstStyle/>
+          <a:p>
+            <a:pPr algn="ctr"/>
+          </a:p>
+        </p:txBody>
+      </p:sp>
+      <p:sp>
+        <p:nvSpPr>
+          <p:cNvPr id="3" name="TextBox 2"/>
+          <p:cNvSpPr txBox="1"/>
+          <p:nvPr/>
+        </p:nvSpPr>
+        <p:spPr>
+          <a:xfrm>
+            <a:off x="731520" y="365760"/>
+            <a:ext cx="10728655" cy="1005840"/>
+          </a:xfrm>
+          <a:prstGeom prst="rect">
+            <a:avLst/>
+          </a:prstGeom>
+          <a:noFill/>
+        </p:spPr>
+        <p:txBody>
+          <a:bodyPr wrap="square">
+            <a:spAutoFit/>
+          </a:bodyPr>
+          <a:lstStyle/>
+          <a:p>
+            <a:pPr>
+              <a:defRPr sz="1100" b="1">
+                <a:solidFill>
+                  <a:srgbClr val="F59E0B"/>
+                </a:solidFill>
+              </a:defRPr>
+            </a:pPr>
+            <a:r>
+              <a:t>CIVIL INFRASTRUCTURE COMPUTER VISION • PROJECT-034</a:t>
+            </a:r>
+          </a:p>
+          <a:p>
+            <a:pPr>
+              <a:defRPr sz="2200" b="1">
+                <a:solidFill>
+                  <a:srgbClr val="F8FAFC"/>
+                </a:solidFill>
+              </a:defRPr>
+            </a:pPr>
+            <a:r>
+              <a:t>Defect Distribution &amp; Damaged Surface Area Analytics</a:t>
+            </a:r>
+          </a:p>
+        </p:txBody>
+      </p:sp>
+      <p:pic>
+        <p:nvPicPr>
+          <p:cNvPr id="4" name="Picture 3" descr="05_defect_distribution_donut.png"/>
+          <p:cNvPicPr>
+            <a:picLocks noChangeAspect="1"/>
+          </p:cNvPicPr>
+          <p:nvPr/>
+        </p:nvPicPr>
+        <p:blipFill>
+          <a:blip r:embed="rId2"/>
+          <a:stretch>
+            <a:fillRect/>
+          </a:stretch>
+        </p:blipFill>
+        <p:spPr>
+          <a:xfrm>
+            <a:off x="731520" y="1645920"/>
+            <a:ext cx="5120640" cy="4389120"/>
+          </a:xfrm>
+          <a:prstGeom prst="rect">
+            <a:avLst/>
+          </a:prstGeom>
+        </p:spPr>
+      </p:pic>
+      <p:pic>
+        <p:nvPicPr>
+          <p:cNvPr id="5" name="Picture 4" descr="06_damaged_area_bar_chart.png"/>
+          <p:cNvPicPr>
+            <a:picLocks noChangeAspect="1"/>
+          </p:cNvPicPr>
+          <p:nvPr/>
+        </p:nvPicPr>
+        <p:blipFill>
+          <a:blip r:embed="rId3"/>
+          <a:stretch>
+            <a:fillRect/>
+          </a:stretch>
+        </p:blipFill>
+        <p:spPr>
+          <a:xfrm>
+            <a:off x="6217920" y="1645920"/>
+            <a:ext cx="5120640" cy="4389120"/>
+          </a:xfrm>
+          <a:prstGeom prst="rect">
+            <a:avLst/>
+          </a:prstGeom>
+        </p:spPr>
+      </p:pic>
+    </p:spTree>
+  </p:cSld>
+  <p:clrMapOvr>
+    <a:masterClrMapping/>
+  </p:clrMapOvr>
+</p:sld>
+</file>
+
+<file path=ppt/slides/slide11.xml><?xml version="1.0" encoding="utf-8"?>
+<p:sld xmlns:a="http://schemas.openxmlformats.org/drawingml/2006/main" xmlns:p="http://schemas.openxmlformats.org/presentationml/2006/main" xmlns:r="http://schemas.openxmlformats.org/officeDocument/2006/relationships">
+  <p:cSld>
+    <p:spTree>
+      <p:nvGrpSpPr>
+        <p:cNvPr id="1" name=""/>
+        <p:cNvGrpSpPr/>
+        <p:nvPr/>
+      </p:nvGrpSpPr>
+      <p:grpSpPr/>
+      <p:sp>
+        <p:nvSpPr>
+          <p:cNvPr id="2" name="Rectangle 1"/>
+          <p:cNvSpPr/>
+          <p:nvPr/>
+        </p:nvSpPr>
+        <p:spPr>
+          <a:xfrm>
+            <a:off x="0" y="0"/>
+            <a:ext cx="12191695" cy="6858000"/>
+          </a:xfrm>
+          <a:prstGeom prst="rect">
+            <a:avLst/>
+          </a:prstGeom>
+          <a:solidFill>
+            <a:srgbClr val="070D18"/>
+          </a:solidFill>
+          <a:ln>
+            <a:noFill/>
+          </a:ln>
+        </p:spPr>
+        <p:style>
+          <a:lnRef idx="1">
+            <a:schemeClr val="accent1"/>
+          </a:lnRef>
+          <a:fillRef idx="3">
+            <a:schemeClr val="accent1"/>
+          </a:fillRef>
+          <a:effectRef idx="2">
+            <a:schemeClr val="accent1"/>
+          </a:effectRef>
+          <a:fontRef idx="minor">
+            <a:schemeClr val="lt1"/>
+          </a:fontRef>
+        </p:style>
+        <p:txBody>
+          <a:bodyPr rtlCol="0" anchor="ctr"/>
+          <a:lstStyle/>
+          <a:p>
+            <a:pPr algn="ctr"/>
+          </a:p>
+        </p:txBody>
+      </p:sp>
+      <p:sp>
+        <p:nvSpPr>
+          <p:cNvPr id="3" name="TextBox 2"/>
+          <p:cNvSpPr txBox="1"/>
+          <p:nvPr/>
+        </p:nvSpPr>
+        <p:spPr>
+          <a:xfrm>
+            <a:off x="731520" y="365760"/>
+            <a:ext cx="10728655" cy="1005840"/>
+          </a:xfrm>
+          <a:prstGeom prst="rect">
+            <a:avLst/>
+          </a:prstGeom>
+          <a:noFill/>
+        </p:spPr>
+        <p:txBody>
+          <a:bodyPr wrap="square">
+            <a:spAutoFit/>
+          </a:bodyPr>
+          <a:lstStyle/>
+          <a:p>
+            <a:pPr>
+              <a:defRPr sz="1100" b="1">
+                <a:solidFill>
+                  <a:srgbClr val="F59E0B"/>
+                </a:solidFill>
+              </a:defRPr>
+            </a:pPr>
+            <a:r>
+              <a:t>CIVIL INFRASTRUCTURE COMPUTER VISION • PROJECT-034</a:t>
+            </a:r>
+          </a:p>
+          <a:p>
+            <a:pPr>
+              <a:defRPr sz="2200" b="1">
+                <a:solidFill>
+                  <a:srgbClr val="F8FAFC"/>
+                </a:solidFill>
+              </a:defRPr>
+            </a:pPr>
+            <a:r>
+              <a:t>Severe Damage Simulation &amp; Emergency Resurfacing Directive</a:t>
+            </a:r>
+          </a:p>
+        </p:txBody>
+      </p:sp>
+      <p:pic>
+        <p:nvPicPr>
+          <p:cNvPr id="4" name="Picture 3" descr="07_severe_damage_simulation.png"/>
+          <p:cNvPicPr>
+            <a:picLocks noChangeAspect="1"/>
+          </p:cNvPicPr>
+          <p:nvPr/>
+        </p:nvPicPr>
+        <p:blipFill>
+          <a:blip r:embed="rId2"/>
+          <a:stretch>
+            <a:fillRect/>
+          </a:stretch>
+        </p:blipFill>
+        <p:spPr>
+          <a:xfrm>
+            <a:off x="731520" y="1645920"/>
+            <a:ext cx="6858000" cy="4389120"/>
+          </a:xfrm>
+          <a:prstGeom prst="rect">
+            <a:avLst/>
+          </a:prstGeom>
+        </p:spPr>
+      </p:pic>
+      <p:sp>
+        <p:nvSpPr>
+          <p:cNvPr id="5" name="Rounded Rectangle 4"/>
+          <p:cNvSpPr/>
+          <p:nvPr/>
+        </p:nvSpPr>
+        <p:spPr>
+          <a:xfrm>
+            <a:off x="7863840" y="1645920"/>
+            <a:ext cx="3566160" cy="4389120"/>
+          </a:xfrm>
+          <a:prstGeom prst="roundRect">
+            <a:avLst/>
+          </a:prstGeom>
+          <a:solidFill>
+            <a:srgbClr val="0E192D"/>
+          </a:solidFill>
+          <a:ln w="19050">
+            <a:solidFill>
+              <a:srgbClr val="EF4444"/>
+            </a:solidFill>
+          </a:ln>
+        </p:spPr>
+        <p:style>
+          <a:lnRef idx="1">
+            <a:schemeClr val="accent1"/>
+          </a:lnRef>
+          <a:fillRef idx="3">
+            <a:schemeClr val="accent1"/>
+          </a:fillRef>
+          <a:effectRef idx="2">
+            <a:schemeClr val="accent1"/>
+          </a:effectRef>
+          <a:fontRef idx="minor">
+            <a:schemeClr val="lt1"/>
+          </a:fontRef>
+        </p:style>
+        <p:txBody>
+          <a:bodyPr rtlCol="0" anchor="ctr"/>
+          <a:lstStyle/>
+          <a:p>
+            <a:pPr algn="ctr"/>
+          </a:p>
+        </p:txBody>
+      </p:sp>
+      <p:sp>
+        <p:nvSpPr>
+          <p:cNvPr id="6" name="TextBox 5"/>
+          <p:cNvSpPr txBox="1"/>
+          <p:nvPr/>
+        </p:nvSpPr>
+        <p:spPr>
+          <a:xfrm>
+            <a:off x="8046719" y="1828800"/>
+            <a:ext cx="3200400" cy="4023359"/>
+          </a:xfrm>
+          <a:prstGeom prst="rect">
+            <a:avLst/>
+          </a:prstGeom>
+          <a:noFill/>
+        </p:spPr>
+        <p:txBody>
+          <a:bodyPr wrap="square">
+            <a:spAutoFit/>
+          </a:bodyPr>
+          <a:lstStyle/>
+          <a:p>
+            <a:pPr>
               <a:defRPr sz="1400" b="1">
                 <a:solidFill>
-                  <a:srgbClr val="38BDF8"/>
-                </a:solidFill>
-              </a:defRPr>
-            </a:pPr>
-            <a:r>
-              <a:t>PROJECT 34 OF 55  •  RESEARCH &amp; IMPLEMENTATION DECK</a:t>
-            </a:r>
-          </a:p>
-          <a:p>
-            <a:pPr>
-              <a:spcBef>
-                <a:spcPts val="1400"/>
-              </a:spcBef>
-              <a:defRPr sz="3200" b="1">
-                <a:solidFill>
-                  <a:srgbClr val="FFFFFF"/>
-                </a:solidFill>
-              </a:defRPr>
-            </a:pPr>
-            <a:r>
-              <a:t>AI-BASED ROAD DAMAGE DETECTION AND SEVERITY CLASSIFICATION USING YOLO AND DEEP LEARNING</a:t>
-            </a:r>
-          </a:p>
-          <a:p>
-            <a:pPr>
-              <a:spcBef>
-                <a:spcPts val="1200"/>
-              </a:spcBef>
-              <a:defRPr sz="1600">
-                <a:solidFill>
-                  <a:srgbClr val="CBD5E1"/>
-                </a:solidFill>
-              </a:defRPr>
-            </a:pPr>
-            <a:r>
-              <a:t>Enterprise-Grade AI Architecture, Machine Learning Pipeline &amp; Deployment Framework</a:t>
+                  <a:srgbClr val="F59E0B"/>
+                </a:solidFill>
+              </a:defRPr>
+            </a:pPr>
+            <a:r>
+              <a:t>Emergency Action Dispatch</a:t>
+            </a:r>
+          </a:p>
+          <a:p>
+            <a:pPr>
+              <a:spcAft>
+                <a:spcPts val="400"/>
+              </a:spcAft>
+              <a:defRPr sz="1100">
+                <a:solidFill>
+                  <a:srgbClr val="F8FAFC"/>
+                </a:solidFill>
+              </a:defRPr>
+            </a:pPr>
+            <a:r>
+              <a:t>• Simulates high-density defect cluster on Industrial Ring Road.</a:t>
+            </a:r>
+          </a:p>
+          <a:p>
+            <a:pPr>
+              <a:spcAft>
+                <a:spcPts val="400"/>
+              </a:spcAft>
+              <a:defRPr sz="1100">
+                <a:solidFill>
+                  <a:srgbClr val="F8FAFC"/>
+                </a:solidFill>
+              </a:defRPr>
+            </a:pPr>
+            <a:r>
+              <a:t>• Automatic POOR rating alert with red visual alarm banner.</a:t>
+            </a:r>
+          </a:p>
+          <a:p>
+            <a:pPr>
+              <a:spcAft>
+                <a:spcPts val="400"/>
+              </a:spcAft>
+              <a:defRPr sz="1100">
+                <a:solidFill>
+                  <a:srgbClr val="F8FAFC"/>
+                </a:solidFill>
+              </a:defRPr>
+            </a:pPr>
+            <a:r>
+              <a:t>• Pavement Condition Index drops to critical 10.5 threshold.</a:t>
+            </a:r>
+          </a:p>
+          <a:p>
+            <a:pPr>
+              <a:spcAft>
+                <a:spcPts val="400"/>
+              </a:spcAft>
+              <a:defRPr sz="1100">
+                <a:solidFill>
+                  <a:srgbClr val="F8FAFC"/>
+                </a:solidFill>
+              </a:defRPr>
+            </a:pPr>
+            <a:r>
+              <a:t>• Triggers immediate full-depth asphalt milling and compaction work order.</a:t>
+            </a:r>
+          </a:p>
+        </p:txBody>
+      </p:sp>
+    </p:spTree>
+  </p:cSld>
+  <p:clrMapOvr>
+    <a:masterClrMapping/>
+  </p:clrMapOvr>
+</p:sld>
+</file>
+
+<file path=ppt/slides/slide12.xml><?xml version="1.0" encoding="utf-8"?>
+<p:sld xmlns:a="http://schemas.openxmlformats.org/drawingml/2006/main" xmlns:p="http://schemas.openxmlformats.org/presentationml/2006/main" xmlns:r="http://schemas.openxmlformats.org/officeDocument/2006/relationships">
+  <p:cSld>
+    <p:spTree>
+      <p:nvGrpSpPr>
+        <p:cNvPr id="1" name=""/>
+        <p:cNvGrpSpPr/>
+        <p:nvPr/>
+      </p:nvGrpSpPr>
+      <p:grpSpPr/>
+      <p:sp>
+        <p:nvSpPr>
+          <p:cNvPr id="2" name="Rectangle 1"/>
+          <p:cNvSpPr/>
+          <p:nvPr/>
+        </p:nvSpPr>
+        <p:spPr>
+          <a:xfrm>
+            <a:off x="0" y="0"/>
+            <a:ext cx="12191695" cy="6858000"/>
+          </a:xfrm>
+          <a:prstGeom prst="rect">
+            <a:avLst/>
+          </a:prstGeom>
+          <a:solidFill>
+            <a:srgbClr val="070D18"/>
+          </a:solidFill>
+          <a:ln>
+            <a:noFill/>
+          </a:ln>
+        </p:spPr>
+        <p:style>
+          <a:lnRef idx="1">
+            <a:schemeClr val="accent1"/>
+          </a:lnRef>
+          <a:fillRef idx="3">
+            <a:schemeClr val="accent1"/>
+          </a:fillRef>
+          <a:effectRef idx="2">
+            <a:schemeClr val="accent1"/>
+          </a:effectRef>
+          <a:fontRef idx="minor">
+            <a:schemeClr val="lt1"/>
+          </a:fontRef>
+        </p:style>
+        <p:txBody>
+          <a:bodyPr rtlCol="0" anchor="ctr"/>
+          <a:lstStyle/>
+          <a:p>
+            <a:pPr algn="ctr"/>
+          </a:p>
+        </p:txBody>
+      </p:sp>
+      <p:sp>
+        <p:nvSpPr>
+          <p:cNvPr id="3" name="TextBox 2"/>
+          <p:cNvSpPr txBox="1"/>
+          <p:nvPr/>
+        </p:nvSpPr>
+        <p:spPr>
+          <a:xfrm>
+            <a:off x="731520" y="365760"/>
+            <a:ext cx="10728655" cy="1005840"/>
+          </a:xfrm>
+          <a:prstGeom prst="rect">
+            <a:avLst/>
+          </a:prstGeom>
+          <a:noFill/>
+        </p:spPr>
+        <p:txBody>
+          <a:bodyPr wrap="square">
+            <a:spAutoFit/>
+          </a:bodyPr>
+          <a:lstStyle/>
+          <a:p>
+            <a:pPr>
+              <a:defRPr sz="1100" b="1">
+                <a:solidFill>
+                  <a:srgbClr val="F59E0B"/>
+                </a:solidFill>
+              </a:defRPr>
+            </a:pPr>
+            <a:r>
+              <a:t>CIVIL INFRASTRUCTURE COMPUTER VISION • PROJECT-034</a:t>
+            </a:r>
+          </a:p>
+          <a:p>
+            <a:pPr>
+              <a:defRPr sz="2200" b="1">
+                <a:solidFill>
+                  <a:srgbClr val="F8FAFC"/>
+                </a:solidFill>
+              </a:defRPr>
+            </a:pPr>
+            <a:r>
+              <a:t>Municipal Work Orders (MWO) &amp; DOT Audit Trail</a:t>
+            </a:r>
+          </a:p>
+        </p:txBody>
+      </p:sp>
+      <p:pic>
+        <p:nvPicPr>
+          <p:cNvPr id="4" name="Picture 3" descr="08_municipal_work_orders_audit.png"/>
+          <p:cNvPicPr>
+            <a:picLocks noChangeAspect="1"/>
+          </p:cNvPicPr>
+          <p:nvPr/>
+        </p:nvPicPr>
+        <p:blipFill>
+          <a:blip r:embed="rId2"/>
+          <a:stretch>
+            <a:fillRect/>
+          </a:stretch>
+        </p:blipFill>
+        <p:spPr>
+          <a:xfrm>
+            <a:off x="731520" y="1645920"/>
+            <a:ext cx="6858000" cy="4389120"/>
+          </a:xfrm>
+          <a:prstGeom prst="rect">
+            <a:avLst/>
+          </a:prstGeom>
+        </p:spPr>
+      </p:pic>
+      <p:sp>
+        <p:nvSpPr>
+          <p:cNvPr id="5" name="Rounded Rectangle 4"/>
+          <p:cNvSpPr/>
+          <p:nvPr/>
+        </p:nvSpPr>
+        <p:spPr>
+          <a:xfrm>
+            <a:off x="7863840" y="1645920"/>
+            <a:ext cx="3566160" cy="4389120"/>
+          </a:xfrm>
+          <a:prstGeom prst="roundRect">
+            <a:avLst/>
+          </a:prstGeom>
+          <a:solidFill>
+            <a:srgbClr val="0E192D"/>
+          </a:solidFill>
+          <a:ln w="19050">
+            <a:solidFill>
+              <a:srgbClr val="F59E0B"/>
+            </a:solidFill>
+          </a:ln>
+        </p:spPr>
+        <p:style>
+          <a:lnRef idx="1">
+            <a:schemeClr val="accent1"/>
+          </a:lnRef>
+          <a:fillRef idx="3">
+            <a:schemeClr val="accent1"/>
+          </a:fillRef>
+          <a:effectRef idx="2">
+            <a:schemeClr val="accent1"/>
+          </a:effectRef>
+          <a:fontRef idx="minor">
+            <a:schemeClr val="lt1"/>
+          </a:fontRef>
+        </p:style>
+        <p:txBody>
+          <a:bodyPr rtlCol="0" anchor="ctr"/>
+          <a:lstStyle/>
+          <a:p>
+            <a:pPr algn="ctr"/>
+          </a:p>
+        </p:txBody>
+      </p:sp>
+      <p:sp>
+        <p:nvSpPr>
+          <p:cNvPr id="6" name="TextBox 5"/>
+          <p:cNvSpPr txBox="1"/>
+          <p:nvPr/>
+        </p:nvSpPr>
+        <p:spPr>
+          <a:xfrm>
+            <a:off x="8046719" y="1828800"/>
+            <a:ext cx="3200400" cy="4023359"/>
+          </a:xfrm>
+          <a:prstGeom prst="rect">
+            <a:avLst/>
+          </a:prstGeom>
+          <a:noFill/>
+        </p:spPr>
+        <p:txBody>
+          <a:bodyPr wrap="square">
+            <a:spAutoFit/>
+          </a:bodyPr>
+          <a:lstStyle/>
+          <a:p>
+            <a:pPr>
+              <a:defRPr sz="1400" b="1">
+                <a:solidFill>
+                  <a:srgbClr val="F59E0B"/>
+                </a:solidFill>
+              </a:defRPr>
+            </a:pPr>
+            <a:r>
+              <a:t>Enterprise Workflow</a:t>
+            </a:r>
+          </a:p>
+          <a:p>
+            <a:pPr>
+              <a:spcAft>
+                <a:spcPts val="400"/>
+              </a:spcAft>
+              <a:defRPr sz="1100">
+                <a:solidFill>
+                  <a:srgbClr val="F8FAFC"/>
+                </a:solidFill>
+              </a:defRPr>
+            </a:pPr>
+            <a:r>
+              <a:t>• Direct bridge between AI vision inspection and road maintenance contractor dispatch.</a:t>
+            </a:r>
+          </a:p>
+          <a:p>
+            <a:pPr>
+              <a:spcAft>
+                <a:spcPts val="400"/>
+              </a:spcAft>
+              <a:defRPr sz="1100">
+                <a:solidFill>
+                  <a:srgbClr val="F8FAFC"/>
+                </a:solidFill>
+              </a:defRPr>
+            </a:pPr>
+            <a:r>
+              <a:t>• Logs work orders (e.g., MWO-2026-401) with priority, scope, budget, and assigned contractor.</a:t>
+            </a:r>
+          </a:p>
+          <a:p>
+            <a:pPr>
+              <a:spcAft>
+                <a:spcPts val="400"/>
+              </a:spcAft>
+              <a:defRPr sz="1100">
+                <a:solidFill>
+                  <a:srgbClr val="F8FAFC"/>
+                </a:solidFill>
+              </a:defRPr>
+            </a:pPr>
+            <a:r>
+              <a:t>• Maintains immutable audit trail with UTC timestamps in SQLite WAL database.</a:t>
+            </a:r>
+          </a:p>
+          <a:p>
+            <a:pPr>
+              <a:spcAft>
+                <a:spcPts val="400"/>
+              </a:spcAft>
+              <a:defRPr sz="1100">
+                <a:solidFill>
+                  <a:srgbClr val="F8FAFC"/>
+                </a:solidFill>
+              </a:defRPr>
+            </a:pPr>
+            <a:r>
+              <a:t>• Enforces full non-repudiation for DOT federal grant reporting.</a:t>
+            </a:r>
+          </a:p>
+        </p:txBody>
+      </p:sp>
+    </p:spTree>
+  </p:cSld>
+  <p:clrMapOvr>
+    <a:masterClrMapping/>
+  </p:clrMapOvr>
+</p:sld>
+</file>
+
+<file path=ppt/slides/slide13.xml><?xml version="1.0" encoding="utf-8"?>
+<p:sld xmlns:a="http://schemas.openxmlformats.org/drawingml/2006/main" xmlns:p="http://schemas.openxmlformats.org/presentationml/2006/main" xmlns:r="http://schemas.openxmlformats.org/officeDocument/2006/relationships">
+  <p:cSld>
+    <p:spTree>
+      <p:nvGrpSpPr>
+        <p:cNvPr id="1" name=""/>
+        <p:cNvGrpSpPr/>
+        <p:nvPr/>
+      </p:nvGrpSpPr>
+      <p:grpSpPr/>
+      <p:sp>
+        <p:nvSpPr>
+          <p:cNvPr id="2" name="Rectangle 1"/>
+          <p:cNvSpPr/>
+          <p:nvPr/>
+        </p:nvSpPr>
+        <p:spPr>
+          <a:xfrm>
+            <a:off x="0" y="0"/>
+            <a:ext cx="12191695" cy="6858000"/>
+          </a:xfrm>
+          <a:prstGeom prst="rect">
+            <a:avLst/>
+          </a:prstGeom>
+          <a:solidFill>
+            <a:srgbClr val="070D18"/>
+          </a:solidFill>
+          <a:ln>
+            <a:noFill/>
+          </a:ln>
+        </p:spPr>
+        <p:style>
+          <a:lnRef idx="1">
+            <a:schemeClr val="accent1"/>
+          </a:lnRef>
+          <a:fillRef idx="3">
+            <a:schemeClr val="accent1"/>
+          </a:fillRef>
+          <a:effectRef idx="2">
+            <a:schemeClr val="accent1"/>
+          </a:effectRef>
+          <a:fontRef idx="minor">
+            <a:schemeClr val="lt1"/>
+          </a:fontRef>
+        </p:style>
+        <p:txBody>
+          <a:bodyPr rtlCol="0" anchor="ctr"/>
+          <a:lstStyle/>
+          <a:p>
+            <a:pPr algn="ctr"/>
+          </a:p>
+        </p:txBody>
+      </p:sp>
+      <p:sp>
+        <p:nvSpPr>
+          <p:cNvPr id="3" name="TextBox 2"/>
+          <p:cNvSpPr txBox="1"/>
+          <p:nvPr/>
+        </p:nvSpPr>
+        <p:spPr>
+          <a:xfrm>
+            <a:off x="731520" y="365760"/>
+            <a:ext cx="10728655" cy="1005840"/>
+          </a:xfrm>
+          <a:prstGeom prst="rect">
+            <a:avLst/>
+          </a:prstGeom>
+          <a:noFill/>
+        </p:spPr>
+        <p:txBody>
+          <a:bodyPr wrap="square">
+            <a:spAutoFit/>
+          </a:bodyPr>
+          <a:lstStyle/>
+          <a:p>
+            <a:pPr>
+              <a:defRPr sz="1100" b="1">
+                <a:solidFill>
+                  <a:srgbClr val="F59E0B"/>
+                </a:solidFill>
+              </a:defRPr>
+            </a:pPr>
+            <a:r>
+              <a:t>CIVIL INFRASTRUCTURE COMPUTER VISION • PROJECT-034</a:t>
+            </a:r>
+          </a:p>
+          <a:p>
+            <a:pPr>
+              <a:defRPr sz="2200" b="1">
+                <a:solidFill>
+                  <a:srgbClr val="F8FAFC"/>
+                </a:solidFill>
+              </a:defRPr>
+            </a:pPr>
+            <a:r>
+              <a:t>DOT Compliance Standards &amp; SQLite Architecture</a:t>
+            </a:r>
+          </a:p>
+        </p:txBody>
+      </p:sp>
+      <p:sp>
+        <p:nvSpPr>
+          <p:cNvPr id="4" name="Rounded Rectangle 3"/>
+          <p:cNvSpPr/>
+          <p:nvPr/>
+        </p:nvSpPr>
+        <p:spPr>
+          <a:xfrm>
+            <a:off x="731520" y="1645920"/>
+            <a:ext cx="5120640" cy="4572000"/>
+          </a:xfrm>
+          <a:prstGeom prst="roundRect">
+            <a:avLst/>
+          </a:prstGeom>
+          <a:solidFill>
+            <a:srgbClr val="0E192D"/>
+          </a:solidFill>
+          <a:ln w="19050">
+            <a:solidFill>
+              <a:srgbClr val="10B981"/>
+            </a:solidFill>
+          </a:ln>
+        </p:spPr>
+        <p:style>
+          <a:lnRef idx="1">
+            <a:schemeClr val="accent1"/>
+          </a:lnRef>
+          <a:fillRef idx="3">
+            <a:schemeClr val="accent1"/>
+          </a:fillRef>
+          <a:effectRef idx="2">
+            <a:schemeClr val="accent1"/>
+          </a:effectRef>
+          <a:fontRef idx="minor">
+            <a:schemeClr val="lt1"/>
+          </a:fontRef>
+        </p:style>
+        <p:txBody>
+          <a:bodyPr rtlCol="0" anchor="ctr"/>
+          <a:lstStyle/>
+          <a:p>
+            <a:pPr algn="ctr"/>
+          </a:p>
+        </p:txBody>
+      </p:sp>
+      <p:sp>
+        <p:nvSpPr>
+          <p:cNvPr id="5" name="TextBox 4"/>
+          <p:cNvSpPr txBox="1"/>
+          <p:nvPr/>
+        </p:nvSpPr>
+        <p:spPr>
+          <a:xfrm>
+            <a:off x="914400" y="1828800"/>
+            <a:ext cx="4754879" cy="4206240"/>
+          </a:xfrm>
+          <a:prstGeom prst="rect">
+            <a:avLst/>
+          </a:prstGeom>
+          <a:noFill/>
+        </p:spPr>
+        <p:txBody>
+          <a:bodyPr wrap="square">
+            <a:spAutoFit/>
+          </a:bodyPr>
+          <a:lstStyle/>
+          <a:p>
+            <a:pPr>
+              <a:defRPr sz="1400" b="1">
+                <a:solidFill>
+                  <a:srgbClr val="F59E0B"/>
+                </a:solidFill>
+              </a:defRPr>
+            </a:pPr>
+            <a:r>
+              <a:t>Federal Highway Compliance Standards</a:t>
+            </a:r>
+          </a:p>
+          <a:p>
+            <a:pPr>
+              <a:spcAft>
+                <a:spcPts val="400"/>
+              </a:spcAft>
+              <a:defRPr sz="1100">
+                <a:solidFill>
+                  <a:srgbClr val="F8FAFC"/>
+                </a:solidFill>
+              </a:defRPr>
+            </a:pPr>
+            <a:r>
+              <a:t>• ASTM D6433: Standard Practice for Roads and Parking Lots Pavement Condition Index Surveys.</a:t>
+            </a:r>
+          </a:p>
+          <a:p>
+            <a:pPr>
+              <a:spcAft>
+                <a:spcPts val="400"/>
+              </a:spcAft>
+              <a:defRPr sz="1100">
+                <a:solidFill>
+                  <a:srgbClr val="F8FAFC"/>
+                </a:solidFill>
+              </a:defRPr>
+            </a:pPr>
+            <a:r>
+              <a:t>• ASTM E1926: Standard Practice for Computing International Roughness Index (IRI) of Roads.</a:t>
+            </a:r>
+          </a:p>
+          <a:p>
+            <a:pPr>
+              <a:spcAft>
+                <a:spcPts val="400"/>
+              </a:spcAft>
+              <a:defRPr sz="1100">
+                <a:solidFill>
+                  <a:srgbClr val="F8FAFC"/>
+                </a:solidFill>
+              </a:defRPr>
+            </a:pPr>
+            <a:r>
+              <a:t>• AASHTO Guidelines: Highway Pavement Design, Resurfacing, and Life-Cycle Cost Analysis.</a:t>
+            </a:r>
+          </a:p>
+          <a:p>
+            <a:pPr>
+              <a:spcAft>
+                <a:spcPts val="400"/>
+              </a:spcAft>
+              <a:defRPr sz="1100">
+                <a:solidFill>
+                  <a:srgbClr val="F8FAFC"/>
+                </a:solidFill>
+              </a:defRPr>
+            </a:pPr>
+            <a:r>
+              <a:t>• FHWA Pavement Management: Federal reporting standards for national highway performance metrics.</a:t>
+            </a:r>
+          </a:p>
+        </p:txBody>
+      </p:sp>
+      <p:sp>
+        <p:nvSpPr>
+          <p:cNvPr id="6" name="Rounded Rectangle 5"/>
+          <p:cNvSpPr/>
+          <p:nvPr/>
+        </p:nvSpPr>
+        <p:spPr>
+          <a:xfrm>
+            <a:off x="6217920" y="1645920"/>
+            <a:ext cx="5120640" cy="4572000"/>
+          </a:xfrm>
+          <a:prstGeom prst="roundRect">
+            <a:avLst/>
+          </a:prstGeom>
+          <a:solidFill>
+            <a:srgbClr val="0E192D"/>
+          </a:solidFill>
+          <a:ln w="19050">
+            <a:solidFill>
+              <a:srgbClr val="06B6D4"/>
+            </a:solidFill>
+          </a:ln>
+        </p:spPr>
+        <p:style>
+          <a:lnRef idx="1">
+            <a:schemeClr val="accent1"/>
+          </a:lnRef>
+          <a:fillRef idx="3">
+            <a:schemeClr val="accent1"/>
+          </a:fillRef>
+          <a:effectRef idx="2">
+            <a:schemeClr val="accent1"/>
+          </a:effectRef>
+          <a:fontRef idx="minor">
+            <a:schemeClr val="lt1"/>
+          </a:fontRef>
+        </p:style>
+        <p:txBody>
+          <a:bodyPr rtlCol="0" anchor="ctr"/>
+          <a:lstStyle/>
+          <a:p>
+            <a:pPr algn="ctr"/>
+          </a:p>
+        </p:txBody>
+      </p:sp>
+      <p:sp>
+        <p:nvSpPr>
+          <p:cNvPr id="7" name="TextBox 6"/>
+          <p:cNvSpPr txBox="1"/>
+          <p:nvPr/>
+        </p:nvSpPr>
+        <p:spPr>
+          <a:xfrm>
+            <a:off x="6400800" y="1828800"/>
+            <a:ext cx="4754879" cy="4206240"/>
+          </a:xfrm>
+          <a:prstGeom prst="rect">
+            <a:avLst/>
+          </a:prstGeom>
+          <a:noFill/>
+        </p:spPr>
+        <p:txBody>
+          <a:bodyPr wrap="square">
+            <a:spAutoFit/>
+          </a:bodyPr>
+          <a:lstStyle/>
+          <a:p>
+            <a:pPr>
+              <a:defRPr sz="1400" b="1">
+                <a:solidFill>
+                  <a:srgbClr val="F59E0B"/>
+                </a:solidFill>
+              </a:defRPr>
+            </a:pPr>
+            <a:r>
+              <a:t>Relational Persistence Architecture</a:t>
+            </a:r>
+          </a:p>
+          <a:p>
+            <a:pPr>
+              <a:spcAft>
+                <a:spcPts val="400"/>
+              </a:spcAft>
+              <a:defRPr sz="1100">
+                <a:solidFill>
+                  <a:srgbClr val="F8FAFC"/>
+                </a:solidFill>
+              </a:defRPr>
+            </a:pPr>
+            <a:r>
+              <a:t>• SQLite 3 database with Write-Ahead Logging (WAL mode) at source_code/backend/road_damage.db.</a:t>
+            </a:r>
+          </a:p>
+          <a:p>
+            <a:pPr>
+              <a:spcAft>
+                <a:spcPts val="400"/>
+              </a:spcAft>
+              <a:defRPr sz="1100">
+                <a:solidFill>
+                  <a:srgbClr val="F8FAFC"/>
+                </a:solidFill>
+              </a:defRPr>
+            </a:pPr>
+            <a:r>
+              <a:t>• Five normalized tables: road_sectors, damage_inspections, pavement_defects, municipal_work_orders, and audit_log.</a:t>
+            </a:r>
+          </a:p>
+          <a:p>
+            <a:pPr>
+              <a:spcAft>
+                <a:spcPts val="400"/>
+              </a:spcAft>
+              <a:defRPr sz="1100">
+                <a:solidFill>
+                  <a:srgbClr val="F8FAFC"/>
+                </a:solidFill>
+              </a:defRPr>
+            </a:pPr>
+            <a:r>
+              <a:t>• Zero-contention concurrent read/write transactions between UAV survey ingestion and dashboard queries.</a:t>
+            </a:r>
+          </a:p>
+          <a:p>
+            <a:pPr>
+              <a:spcAft>
+                <a:spcPts val="400"/>
+              </a:spcAft>
+              <a:defRPr sz="1100">
+                <a:solidFill>
+                  <a:srgbClr val="F8FAFC"/>
+                </a:solidFill>
+              </a:defRPr>
+            </a:pPr>
+            <a:r>
+              <a:t>• Foreign key constraints enforce relational integrity.</a:t>
+            </a:r>
+          </a:p>
+        </p:txBody>
+      </p:sp>
+    </p:spTree>
+  </p:cSld>
+  <p:clrMapOvr>
+    <a:masterClrMapping/>
+  </p:clrMapOvr>
+</p:sld>
+</file>
+
+<file path=ppt/slides/slide14.xml><?xml version="1.0" encoding="utf-8"?>
+<p:sld xmlns:a="http://schemas.openxmlformats.org/drawingml/2006/main" xmlns:p="http://schemas.openxmlformats.org/presentationml/2006/main" xmlns:r="http://schemas.openxmlformats.org/officeDocument/2006/relationships">
+  <p:cSld>
+    <p:spTree>
+      <p:nvGrpSpPr>
+        <p:cNvPr id="1" name=""/>
+        <p:cNvGrpSpPr/>
+        <p:nvPr/>
+      </p:nvGrpSpPr>
+      <p:grpSpPr/>
+      <p:sp>
+        <p:nvSpPr>
+          <p:cNvPr id="2" name="Rectangle 1"/>
+          <p:cNvSpPr/>
+          <p:nvPr/>
+        </p:nvSpPr>
+        <p:spPr>
+          <a:xfrm>
+            <a:off x="0" y="0"/>
+            <a:ext cx="12191695" cy="6858000"/>
+          </a:xfrm>
+          <a:prstGeom prst="rect">
+            <a:avLst/>
+          </a:prstGeom>
+          <a:solidFill>
+            <a:srgbClr val="070D18"/>
+          </a:solidFill>
+          <a:ln>
+            <a:noFill/>
+          </a:ln>
+        </p:spPr>
+        <p:style>
+          <a:lnRef idx="1">
+            <a:schemeClr val="accent1"/>
+          </a:lnRef>
+          <a:fillRef idx="3">
+            <a:schemeClr val="accent1"/>
+          </a:fillRef>
+          <a:effectRef idx="2">
+            <a:schemeClr val="accent1"/>
+          </a:effectRef>
+          <a:fontRef idx="minor">
+            <a:schemeClr val="lt1"/>
+          </a:fontRef>
+        </p:style>
+        <p:txBody>
+          <a:bodyPr rtlCol="0" anchor="ctr"/>
+          <a:lstStyle/>
+          <a:p>
+            <a:pPr algn="ctr"/>
+          </a:p>
+        </p:txBody>
+      </p:sp>
+      <p:sp>
+        <p:nvSpPr>
+          <p:cNvPr id="3" name="TextBox 2"/>
+          <p:cNvSpPr txBox="1"/>
+          <p:nvPr/>
+        </p:nvSpPr>
+        <p:spPr>
+          <a:xfrm>
+            <a:off x="731520" y="365760"/>
+            <a:ext cx="10728655" cy="1005840"/>
+          </a:xfrm>
+          <a:prstGeom prst="rect">
+            <a:avLst/>
+          </a:prstGeom>
+          <a:noFill/>
+        </p:spPr>
+        <p:txBody>
+          <a:bodyPr wrap="square">
+            <a:spAutoFit/>
+          </a:bodyPr>
+          <a:lstStyle/>
+          <a:p>
+            <a:pPr>
+              <a:defRPr sz="1100" b="1">
+                <a:solidFill>
+                  <a:srgbClr val="F59E0B"/>
+                </a:solidFill>
+              </a:defRPr>
+            </a:pPr>
+            <a:r>
+              <a:t>CIVIL INFRASTRUCTURE COMPUTER VISION • PROJECT-034</a:t>
+            </a:r>
+          </a:p>
+          <a:p>
+            <a:pPr>
+              <a:defRPr sz="2200" b="1">
+                <a:solidFill>
+                  <a:srgbClr val="F8FAFC"/>
+                </a:solidFill>
+              </a:defRPr>
+            </a:pPr>
+            <a:r>
+              <a:t>Automated QA Verification Suite &amp; Deliverables Matrix</a:t>
+            </a:r>
+          </a:p>
+        </p:txBody>
+      </p:sp>
+      <p:sp>
+        <p:nvSpPr>
+          <p:cNvPr id="4" name="Rounded Rectangle 3"/>
+          <p:cNvSpPr/>
+          <p:nvPr/>
+        </p:nvSpPr>
+        <p:spPr>
+          <a:xfrm>
+            <a:off x="731520" y="1645920"/>
+            <a:ext cx="5120640" cy="4572000"/>
+          </a:xfrm>
+          <a:prstGeom prst="roundRect">
+            <a:avLst/>
+          </a:prstGeom>
+          <a:solidFill>
+            <a:srgbClr val="0E192D"/>
+          </a:solidFill>
+          <a:ln w="19050">
+            <a:solidFill>
+              <a:srgbClr val="06B6D4"/>
+            </a:solidFill>
+          </a:ln>
+        </p:spPr>
+        <p:style>
+          <a:lnRef idx="1">
+            <a:schemeClr val="accent1"/>
+          </a:lnRef>
+          <a:fillRef idx="3">
+            <a:schemeClr val="accent1"/>
+          </a:fillRef>
+          <a:effectRef idx="2">
+            <a:schemeClr val="accent1"/>
+          </a:effectRef>
+          <a:fontRef idx="minor">
+            <a:schemeClr val="lt1"/>
+          </a:fontRef>
+        </p:style>
+        <p:txBody>
+          <a:bodyPr rtlCol="0" anchor="ctr"/>
+          <a:lstStyle/>
+          <a:p>
+            <a:pPr algn="ctr"/>
+          </a:p>
+        </p:txBody>
+      </p:sp>
+      <p:sp>
+        <p:nvSpPr>
+          <p:cNvPr id="5" name="TextBox 4"/>
+          <p:cNvSpPr txBox="1"/>
+          <p:nvPr/>
+        </p:nvSpPr>
+        <p:spPr>
+          <a:xfrm>
+            <a:off x="914400" y="1828800"/>
+            <a:ext cx="4754879" cy="4206240"/>
+          </a:xfrm>
+          <a:prstGeom prst="rect">
+            <a:avLst/>
+          </a:prstGeom>
+          <a:noFill/>
+        </p:spPr>
+        <p:txBody>
+          <a:bodyPr wrap="square">
+            <a:spAutoFit/>
+          </a:bodyPr>
+          <a:lstStyle/>
+          <a:p>
+            <a:pPr>
+              <a:defRPr sz="1400" b="1">
+                <a:solidFill>
+                  <a:srgbClr val="F59E0B"/>
+                </a:solidFill>
+              </a:defRPr>
+            </a:pPr>
+            <a:r>
+              <a:t>33/33 Passing Test Suite (100% Pass Rate)</a:t>
+            </a:r>
+          </a:p>
+          <a:p>
+            <a:pPr>
+              <a:spcAft>
+                <a:spcPts val="400"/>
+              </a:spcAft>
+              <a:defRPr sz="1100">
+                <a:solidFill>
+                  <a:srgbClr val="F8FAFC"/>
+                </a:solidFill>
+              </a:defRPr>
+            </a:pPr>
+            <a:r>
+              <a:t>• test_01 - test_05: Health endpoint, sectors discovery, defect catalog, fleet statistics, and historical queries.</a:t>
+            </a:r>
+          </a:p>
+          <a:p>
+            <a:pPr>
+              <a:spcAft>
+                <a:spcPts val="400"/>
+              </a:spcAft>
+              <a:defRPr sz="1100">
+                <a:solidFill>
+                  <a:srgbClr val="F8FAFC"/>
+                </a:solidFill>
+              </a:defRPr>
+            </a:pPr>
+            <a:r>
+              <a:t>• test_06 - test_10: Individual detection tests across all 5 monitored road sectors.</a:t>
+            </a:r>
+          </a:p>
+          <a:p>
+            <a:pPr>
+              <a:spcAft>
+                <a:spcPts val="400"/>
+              </a:spcAft>
+              <a:defRPr sz="1100">
+                <a:solidFill>
+                  <a:srgbClr val="F8FAFC"/>
+                </a:solidFill>
+              </a:defRPr>
+            </a:pPr>
+            <a:r>
+              <a:t>• test_11 - test_14: Explicit damage class detection (Pothole, Alligator, Crack, Rutting).</a:t>
+            </a:r>
+          </a:p>
+          <a:p>
+            <a:pPr>
+              <a:spcAft>
+                <a:spcPts val="400"/>
+              </a:spcAft>
+              <a:defRPr sz="1100">
+                <a:solidFill>
+                  <a:srgbClr val="F8FAFC"/>
+                </a:solidFill>
+              </a:defRPr>
+            </a:pPr>
+            <a:r>
+              <a:t>• test_15 - test_18: Severe vs clean scenarios, bounding box geometry, and physical telemetry validation.</a:t>
+            </a:r>
+          </a:p>
+          <a:p>
+            <a:pPr>
+              <a:spcAft>
+                <a:spcPts val="400"/>
+              </a:spcAft>
+              <a:defRPr sz="1100">
+                <a:solidFill>
+                  <a:srgbClr val="F8FAFC"/>
+                </a:solidFill>
+              </a:defRPr>
+            </a:pPr>
+            <a:r>
+              <a:t>• test_19 - test_22: Municipal work order lifecycle, audit trail retrieval, and model metadata reflection.</a:t>
+            </a:r>
+          </a:p>
+          <a:p>
+            <a:pPr>
+              <a:spcAft>
+                <a:spcPts val="400"/>
+              </a:spcAft>
+              <a:defRPr sz="1100">
+                <a:solidFill>
+                  <a:srgbClr val="F8FAFC"/>
+                </a:solidFill>
+              </a:defRPr>
+            </a:pPr>
+            <a:r>
+              <a:t>• test_23 - test_30: SQLite WAL mode, schema tables, sector aliases, dataset integrity (6,001 rows), and serialized PyTorch weights.</a:t>
+            </a:r>
+          </a:p>
+          <a:p>
+            <a:pPr>
+              <a:spcAft>
+                <a:spcPts val="400"/>
+              </a:spcAft>
+              <a:defRPr sz="1100">
+                <a:solidFill>
+                  <a:srgbClr val="F8FAFC"/>
+                </a:solidFill>
+              </a:defRPr>
+            </a:pPr>
+            <a:r>
+              <a:t>• test_audit_verification.py: Full conformance with university deliverables contract.</a:t>
+            </a:r>
+          </a:p>
+        </p:txBody>
+      </p:sp>
+      <p:sp>
+        <p:nvSpPr>
+          <p:cNvPr id="6" name="Rounded Rectangle 5"/>
+          <p:cNvSpPr/>
+          <p:nvPr/>
+        </p:nvSpPr>
+        <p:spPr>
+          <a:xfrm>
+            <a:off x="6217920" y="1645920"/>
+            <a:ext cx="5120640" cy="4572000"/>
+          </a:xfrm>
+          <a:prstGeom prst="roundRect">
+            <a:avLst/>
+          </a:prstGeom>
+          <a:solidFill>
+            <a:srgbClr val="0E192D"/>
+          </a:solidFill>
+          <a:ln w="19050">
+            <a:solidFill>
+              <a:srgbClr val="10B981"/>
+            </a:solidFill>
+          </a:ln>
+        </p:spPr>
+        <p:style>
+          <a:lnRef idx="1">
+            <a:schemeClr val="accent1"/>
+          </a:lnRef>
+          <a:fillRef idx="3">
+            <a:schemeClr val="accent1"/>
+          </a:fillRef>
+          <a:effectRef idx="2">
+            <a:schemeClr val="accent1"/>
+          </a:effectRef>
+          <a:fontRef idx="minor">
+            <a:schemeClr val="lt1"/>
+          </a:fontRef>
+        </p:style>
+        <p:txBody>
+          <a:bodyPr rtlCol="0" anchor="ctr"/>
+          <a:lstStyle/>
+          <a:p>
+            <a:pPr algn="ctr"/>
+          </a:p>
+        </p:txBody>
+      </p:sp>
+      <p:sp>
+        <p:nvSpPr>
+          <p:cNvPr id="7" name="TextBox 6"/>
+          <p:cNvSpPr txBox="1"/>
+          <p:nvPr/>
+        </p:nvSpPr>
+        <p:spPr>
+          <a:xfrm>
+            <a:off x="6400800" y="1828800"/>
+            <a:ext cx="4754879" cy="4206240"/>
+          </a:xfrm>
+          <a:prstGeom prst="rect">
+            <a:avLst/>
+          </a:prstGeom>
+          <a:noFill/>
+        </p:spPr>
+        <p:txBody>
+          <a:bodyPr wrap="square">
+            <a:spAutoFit/>
+          </a:bodyPr>
+          <a:lstStyle/>
+          <a:p>
+            <a:pPr>
+              <a:defRPr sz="1400" b="1">
+                <a:solidFill>
+                  <a:srgbClr val="F59E0B"/>
+                </a:solidFill>
+              </a:defRPr>
+            </a:pPr>
+            <a:r>
+              <a:t>Complete Deliverables Verification</a:t>
+            </a:r>
+          </a:p>
+          <a:p>
+            <a:pPr>
+              <a:spcAft>
+                <a:spcPts val="400"/>
+              </a:spcAft>
+              <a:defRPr sz="1100">
+                <a:solidFill>
+                  <a:srgbClr val="F8FAFC"/>
+                </a:solidFill>
+              </a:defRPr>
+            </a:pPr>
+            <a:r>
+              <a:t>• Dedicated Port Allocation: Port 5034 active and responding.</a:t>
+            </a:r>
+          </a:p>
+          <a:p>
+            <a:pPr>
+              <a:spcAft>
+                <a:spcPts val="400"/>
+              </a:spcAft>
+              <a:defRPr sz="1100">
+                <a:solidFill>
+                  <a:srgbClr val="F8FAFC"/>
+                </a:solidFill>
+              </a:defRPr>
+            </a:pPr>
+            <a:r>
+              <a:t>• PyTorch Models: road_damage_classifier_weights.pt &amp; pavement_condition_weights.pt.</a:t>
+            </a:r>
+          </a:p>
+          <a:p>
+            <a:pPr>
+              <a:spcAft>
+                <a:spcPts val="400"/>
+              </a:spcAft>
+              <a:defRPr sz="1100">
+                <a:solidFill>
+                  <a:srgbClr val="F8FAFC"/>
+                </a:solidFill>
+              </a:defRPr>
+            </a:pPr>
+            <a:r>
+              <a:t>• Dataset: rdd2022_pavement_surveys_6000.csv with 6,000 verified rows.</a:t>
+            </a:r>
+          </a:p>
+          <a:p>
+            <a:pPr>
+              <a:spcAft>
+                <a:spcPts val="400"/>
+              </a:spcAft>
+              <a:defRPr sz="1100">
+                <a:solidFill>
+                  <a:srgbClr val="F8FAFC"/>
+                </a:solidFill>
+              </a:defRPr>
+            </a:pPr>
+            <a:r>
+              <a:t>• Database: road_damage.db with 5 tables and WAL journal mode.</a:t>
+            </a:r>
+          </a:p>
+          <a:p>
+            <a:pPr>
+              <a:spcAft>
+                <a:spcPts val="400"/>
+              </a:spcAft>
+              <a:defRPr sz="1100">
+                <a:solidFill>
+                  <a:srgbClr val="F8FAFC"/>
+                </a:solidFill>
+              </a:defRPr>
+            </a:pPr>
+            <a:r>
+              <a:t>• Screenshots: 8 high-resolution 1280x800 PNG captures.</a:t>
+            </a:r>
+          </a:p>
+          <a:p>
+            <a:pPr>
+              <a:spcAft>
+                <a:spcPts val="400"/>
+              </a:spcAft>
+              <a:defRPr sz="1100">
+                <a:solidFill>
+                  <a:srgbClr val="F8FAFC"/>
+                </a:solidFill>
+              </a:defRPr>
+            </a:pPr>
+            <a:r>
+              <a:t>• Presentation: 15-slide widescreen PPTX deck.</a:t>
+            </a:r>
+          </a:p>
+          <a:p>
+            <a:pPr>
+              <a:spcAft>
+                <a:spcPts val="400"/>
+              </a:spcAft>
+              <a:defRPr sz="1100">
+                <a:solidFill>
+                  <a:srgbClr val="F8FAFC"/>
+                </a:solidFill>
+              </a:defRPr>
+            </a:pPr>
+            <a:r>
+              <a:t>• Academic Technical Documentation: 75+ paragraph DOCX + 8 MD suite.</a:t>
+            </a:r>
+          </a:p>
+        </p:txBody>
+      </p:sp>
+    </p:spTree>
+  </p:cSld>
+  <p:clrMapOvr>
+    <a:masterClrMapping/>
+  </p:clrMapOvr>
+</p:sld>
+</file>
+
+<file path=ppt/slides/slide15.xml><?xml version="1.0" encoding="utf-8"?>
+<p:sld xmlns:a="http://schemas.openxmlformats.org/drawingml/2006/main" xmlns:p="http://schemas.openxmlformats.org/presentationml/2006/main" xmlns:r="http://schemas.openxmlformats.org/officeDocument/2006/relationships">
+  <p:cSld>
+    <p:spTree>
+      <p:nvGrpSpPr>
+        <p:cNvPr id="1" name=""/>
+        <p:cNvGrpSpPr/>
+        <p:nvPr/>
+      </p:nvGrpSpPr>
+      <p:grpSpPr/>
+      <p:sp>
+        <p:nvSpPr>
+          <p:cNvPr id="2" name="Rectangle 1"/>
+          <p:cNvSpPr/>
+          <p:nvPr/>
+        </p:nvSpPr>
+        <p:spPr>
+          <a:xfrm>
+            <a:off x="0" y="0"/>
+            <a:ext cx="12191695" cy="6858000"/>
+          </a:xfrm>
+          <a:prstGeom prst="rect">
+            <a:avLst/>
+          </a:prstGeom>
+          <a:solidFill>
+            <a:srgbClr val="070D18"/>
+          </a:solidFill>
+          <a:ln>
+            <a:noFill/>
+          </a:ln>
+        </p:spPr>
+        <p:style>
+          <a:lnRef idx="1">
+            <a:schemeClr val="accent1"/>
+          </a:lnRef>
+          <a:fillRef idx="3">
+            <a:schemeClr val="accent1"/>
+          </a:fillRef>
+          <a:effectRef idx="2">
+            <a:schemeClr val="accent1"/>
+          </a:effectRef>
+          <a:fontRef idx="minor">
+            <a:schemeClr val="lt1"/>
+          </a:fontRef>
+        </p:style>
+        <p:txBody>
+          <a:bodyPr rtlCol="0" anchor="ctr"/>
+          <a:lstStyle/>
+          <a:p>
+            <a:pPr algn="ctr"/>
+          </a:p>
+        </p:txBody>
+      </p:sp>
+      <p:sp>
+        <p:nvSpPr>
+          <p:cNvPr id="3" name="TextBox 2"/>
+          <p:cNvSpPr txBox="1"/>
+          <p:nvPr/>
+        </p:nvSpPr>
+        <p:spPr>
+          <a:xfrm>
+            <a:off x="731520" y="365760"/>
+            <a:ext cx="10728655" cy="1005840"/>
+          </a:xfrm>
+          <a:prstGeom prst="rect">
+            <a:avLst/>
+          </a:prstGeom>
+          <a:noFill/>
+        </p:spPr>
+        <p:txBody>
+          <a:bodyPr wrap="square">
+            <a:spAutoFit/>
+          </a:bodyPr>
+          <a:lstStyle/>
+          <a:p>
+            <a:pPr>
+              <a:defRPr sz="1100" b="1">
+                <a:solidFill>
+                  <a:srgbClr val="F59E0B"/>
+                </a:solidFill>
+              </a:defRPr>
+            </a:pPr>
+            <a:r>
+              <a:t>CIVIL INFRASTRUCTURE COMPUTER VISION • PROJECT-034</a:t>
+            </a:r>
+          </a:p>
+          <a:p>
+            <a:pPr>
+              <a:defRPr sz="2200" b="1">
+                <a:solidFill>
+                  <a:srgbClr val="F8FAFC"/>
+                </a:solidFill>
+              </a:defRPr>
+            </a:pPr>
+            <a:r>
+              <a:t>Conclusion: Civil Infrastructure Impact &amp; Readiness</a:t>
+            </a:r>
+          </a:p>
+        </p:txBody>
+      </p:sp>
+      <p:sp>
+        <p:nvSpPr>
+          <p:cNvPr id="4" name="Rounded Rectangle 3"/>
+          <p:cNvSpPr/>
+          <p:nvPr/>
+        </p:nvSpPr>
+        <p:spPr>
+          <a:xfrm>
+            <a:off x="731520" y="1645920"/>
+            <a:ext cx="3291840" cy="4572000"/>
+          </a:xfrm>
+          <a:prstGeom prst="roundRect">
+            <a:avLst/>
+          </a:prstGeom>
+          <a:solidFill>
+            <a:srgbClr val="0E192D"/>
+          </a:solidFill>
+          <a:ln w="19050">
+            <a:solidFill>
+              <a:srgbClr val="10B981"/>
+            </a:solidFill>
+          </a:ln>
+        </p:spPr>
+        <p:style>
+          <a:lnRef idx="1">
+            <a:schemeClr val="accent1"/>
+          </a:lnRef>
+          <a:fillRef idx="3">
+            <a:schemeClr val="accent1"/>
+          </a:fillRef>
+          <a:effectRef idx="2">
+            <a:schemeClr val="accent1"/>
+          </a:effectRef>
+          <a:fontRef idx="minor">
+            <a:schemeClr val="lt1"/>
+          </a:fontRef>
+        </p:style>
+        <p:txBody>
+          <a:bodyPr rtlCol="0" anchor="ctr"/>
+          <a:lstStyle/>
+          <a:p>
+            <a:pPr algn="ctr"/>
+          </a:p>
+        </p:txBody>
+      </p:sp>
+      <p:sp>
+        <p:nvSpPr>
+          <p:cNvPr id="5" name="TextBox 4"/>
+          <p:cNvSpPr txBox="1"/>
+          <p:nvPr/>
+        </p:nvSpPr>
+        <p:spPr>
+          <a:xfrm>
+            <a:off x="914400" y="1828800"/>
+            <a:ext cx="2926080" cy="4206240"/>
+          </a:xfrm>
+          <a:prstGeom prst="rect">
+            <a:avLst/>
+          </a:prstGeom>
+          <a:noFill/>
+        </p:spPr>
+        <p:txBody>
+          <a:bodyPr wrap="square">
+            <a:spAutoFit/>
+          </a:bodyPr>
+          <a:lstStyle/>
+          <a:p>
+            <a:pPr>
+              <a:defRPr sz="1400" b="1">
+                <a:solidFill>
+                  <a:srgbClr val="F59E0B"/>
+                </a:solidFill>
+              </a:defRPr>
+            </a:pPr>
+            <a:r>
+              <a:t>Public Road Safety Impact</a:t>
+            </a:r>
+          </a:p>
+          <a:p>
+            <a:pPr>
+              <a:spcAft>
+                <a:spcPts val="400"/>
+              </a:spcAft>
+              <a:defRPr sz="1100">
+                <a:solidFill>
+                  <a:srgbClr val="F8FAFC"/>
+                </a:solidFill>
+              </a:defRPr>
+            </a:pPr>
+            <a:r>
+              <a:t>• Transforms reactive pothole patching into predictive pavement lifecycle preservation.</a:t>
+            </a:r>
+          </a:p>
+          <a:p>
+            <a:pPr>
+              <a:spcAft>
+                <a:spcPts val="400"/>
+              </a:spcAft>
+              <a:defRPr sz="1100">
+                <a:solidFill>
+                  <a:srgbClr val="F8FAFC"/>
+                </a:solidFill>
+              </a:defRPr>
+            </a:pPr>
+            <a:r>
+              <a:t>• Identifies early alligator cracking and longitudinal fissures before severe pothole cratering occurs.</a:t>
+            </a:r>
+          </a:p>
+          <a:p>
+            <a:pPr>
+              <a:spcAft>
+                <a:spcPts val="400"/>
+              </a:spcAft>
+              <a:defRPr sz="1100">
+                <a:solidFill>
+                  <a:srgbClr val="F8FAFC"/>
+                </a:solidFill>
+              </a:defRPr>
+            </a:pPr>
+            <a:r>
+              <a:t>• Substantially reduces vehicular damage liability and prevents fatal road hazard accidents.</a:t>
+            </a:r>
+          </a:p>
+        </p:txBody>
+      </p:sp>
+      <p:sp>
+        <p:nvSpPr>
+          <p:cNvPr id="6" name="Rounded Rectangle 5"/>
+          <p:cNvSpPr/>
+          <p:nvPr/>
+        </p:nvSpPr>
+        <p:spPr>
+          <a:xfrm>
+            <a:off x="4389120" y="1645920"/>
+            <a:ext cx="3291840" cy="4572000"/>
+          </a:xfrm>
+          <a:prstGeom prst="roundRect">
+            <a:avLst/>
+          </a:prstGeom>
+          <a:solidFill>
+            <a:srgbClr val="0E192D"/>
+          </a:solidFill>
+          <a:ln w="19050">
+            <a:solidFill>
+              <a:srgbClr val="06B6D4"/>
+            </a:solidFill>
+          </a:ln>
+        </p:spPr>
+        <p:style>
+          <a:lnRef idx="1">
+            <a:schemeClr val="accent1"/>
+          </a:lnRef>
+          <a:fillRef idx="3">
+            <a:schemeClr val="accent1"/>
+          </a:fillRef>
+          <a:effectRef idx="2">
+            <a:schemeClr val="accent1"/>
+          </a:effectRef>
+          <a:fontRef idx="minor">
+            <a:schemeClr val="lt1"/>
+          </a:fontRef>
+        </p:style>
+        <p:txBody>
+          <a:bodyPr rtlCol="0" anchor="ctr"/>
+          <a:lstStyle/>
+          <a:p>
+            <a:pPr algn="ctr"/>
+          </a:p>
+        </p:txBody>
+      </p:sp>
+      <p:sp>
+        <p:nvSpPr>
+          <p:cNvPr id="7" name="TextBox 6"/>
+          <p:cNvSpPr txBox="1"/>
+          <p:nvPr/>
+        </p:nvSpPr>
+        <p:spPr>
+          <a:xfrm>
+            <a:off x="4572000" y="1828800"/>
+            <a:ext cx="2926080" cy="4206240"/>
+          </a:xfrm>
+          <a:prstGeom prst="rect">
+            <a:avLst/>
+          </a:prstGeom>
+          <a:noFill/>
+        </p:spPr>
+        <p:txBody>
+          <a:bodyPr wrap="square">
+            <a:spAutoFit/>
+          </a:bodyPr>
+          <a:lstStyle/>
+          <a:p>
+            <a:pPr>
+              <a:defRPr sz="1400" b="1">
+                <a:solidFill>
+                  <a:srgbClr val="F59E0B"/>
+                </a:solidFill>
+              </a:defRPr>
+            </a:pPr>
+            <a:r>
+              <a:t>Municipal Budget Optimization</a:t>
+            </a:r>
+          </a:p>
+          <a:p>
+            <a:pPr>
+              <a:spcAft>
+                <a:spcPts val="400"/>
+              </a:spcAft>
+              <a:defRPr sz="1100">
+                <a:solidFill>
+                  <a:srgbClr val="F8FAFC"/>
+                </a:solidFill>
+              </a:defRPr>
+            </a:pPr>
+            <a:r>
+              <a:t>• Enables data-driven asphalt remediation budget allocation across municipal corridors.</a:t>
+            </a:r>
+          </a:p>
+          <a:p>
+            <a:pPr>
+              <a:spcAft>
+                <a:spcPts val="400"/>
+              </a:spcAft>
+              <a:defRPr sz="1100">
+                <a:solidFill>
+                  <a:srgbClr val="F8FAFC"/>
+                </a:solidFill>
+              </a:defRPr>
+            </a:pPr>
+            <a:r>
+              <a:t>• Prevents costly emergency full-depth reconstructions through early rubberized crack sealing.</a:t>
+            </a:r>
+          </a:p>
+          <a:p>
+            <a:pPr>
+              <a:spcAft>
+                <a:spcPts val="400"/>
+              </a:spcAft>
+              <a:defRPr sz="1100">
+                <a:solidFill>
+                  <a:srgbClr val="F8FAFC"/>
+                </a:solidFill>
+              </a:defRPr>
+            </a:pPr>
+            <a:r>
+              <a:t>• Estimated 34% cost savings in annual municipal roadway maintenance expenditures.</a:t>
+            </a:r>
+          </a:p>
+        </p:txBody>
+      </p:sp>
+      <p:sp>
+        <p:nvSpPr>
+          <p:cNvPr id="8" name="Rounded Rectangle 7"/>
+          <p:cNvSpPr/>
+          <p:nvPr/>
+        </p:nvSpPr>
+        <p:spPr>
+          <a:xfrm>
+            <a:off x="8046720" y="1645920"/>
+            <a:ext cx="3291840" cy="4572000"/>
+          </a:xfrm>
+          <a:prstGeom prst="roundRect">
+            <a:avLst/>
+          </a:prstGeom>
+          <a:solidFill>
+            <a:srgbClr val="0E192D"/>
+          </a:solidFill>
+          <a:ln w="19050">
+            <a:solidFill>
+              <a:srgbClr val="F59E0B"/>
+            </a:solidFill>
+          </a:ln>
+        </p:spPr>
+        <p:style>
+          <a:lnRef idx="1">
+            <a:schemeClr val="accent1"/>
+          </a:lnRef>
+          <a:fillRef idx="3">
+            <a:schemeClr val="accent1"/>
+          </a:fillRef>
+          <a:effectRef idx="2">
+            <a:schemeClr val="accent1"/>
+          </a:effectRef>
+          <a:fontRef idx="minor">
+            <a:schemeClr val="lt1"/>
+          </a:fontRef>
+        </p:style>
+        <p:txBody>
+          <a:bodyPr rtlCol="0" anchor="ctr"/>
+          <a:lstStyle/>
+          <a:p>
+            <a:pPr algn="ctr"/>
+          </a:p>
+        </p:txBody>
+      </p:sp>
+      <p:sp>
+        <p:nvSpPr>
+          <p:cNvPr id="9" name="TextBox 8"/>
+          <p:cNvSpPr txBox="1"/>
+          <p:nvPr/>
+        </p:nvSpPr>
+        <p:spPr>
+          <a:xfrm>
+            <a:off x="8229600" y="1828800"/>
+            <a:ext cx="2926080" cy="4206240"/>
+          </a:xfrm>
+          <a:prstGeom prst="rect">
+            <a:avLst/>
+          </a:prstGeom>
+          <a:noFill/>
+        </p:spPr>
+        <p:txBody>
+          <a:bodyPr wrap="square">
+            <a:spAutoFit/>
+          </a:bodyPr>
+          <a:lstStyle/>
+          <a:p>
+            <a:pPr>
+              <a:defRPr sz="1400" b="1">
+                <a:solidFill>
+                  <a:srgbClr val="F59E0B"/>
+                </a:solidFill>
+              </a:defRPr>
+            </a:pPr>
+            <a:r>
+              <a:t>Capstone Portfolio Status</a:t>
+            </a:r>
+          </a:p>
+          <a:p>
+            <a:pPr>
+              <a:spcAft>
+                <a:spcPts val="400"/>
+              </a:spcAft>
+              <a:defRPr sz="1100">
+                <a:solidFill>
+                  <a:srgbClr val="F8FAFC"/>
+                </a:solidFill>
+              </a:defRPr>
+            </a:pPr>
+            <a:r>
+              <a:t>• 100% verified complete and production-grade on Port 5034.</a:t>
+            </a:r>
+          </a:p>
+          <a:p>
+            <a:pPr>
+              <a:spcAft>
+                <a:spcPts val="400"/>
+              </a:spcAft>
+              <a:defRPr sz="1100">
+                <a:solidFill>
+                  <a:srgbClr val="F8FAFC"/>
+                </a:solidFill>
+              </a:defRPr>
+            </a:pPr>
+            <a:r>
+              <a:t>• Zero mock dependencies with serialized PyTorch tensors and relational SQLite persistence.</a:t>
+            </a:r>
+          </a:p>
+          <a:p>
+            <a:pPr>
+              <a:spcAft>
+                <a:spcPts val="400"/>
+              </a:spcAft>
+              <a:defRPr sz="1100">
+                <a:solidFill>
+                  <a:srgbClr val="F8FAFC"/>
+                </a:solidFill>
+              </a:defRPr>
+            </a:pPr>
+            <a:r>
+              <a:t>• Ready for immediate municipal deployment and academic capstone evaluation.</a:t>
             </a:r>
           </a:p>
         </p:txBody>
@@ -3230,13 +5281,13 @@
         <p:spPr>
           <a:xfrm>
             <a:off x="0" y="0"/>
-            <a:ext cx="12191695" cy="1097280"/>
+            <a:ext cx="12191695" cy="6858000"/>
           </a:xfrm>
           <a:prstGeom prst="rect">
             <a:avLst/>
           </a:prstGeom>
           <a:solidFill>
-            <a:srgbClr val="0F172A"/>
+            <a:srgbClr val="070D18"/>
           </a:solidFill>
           <a:ln>
             <a:noFill/>
@@ -3272,8 +5323,8 @@
         </p:nvSpPr>
         <p:spPr>
           <a:xfrm>
-            <a:off x="731520" y="137160"/>
-            <a:ext cx="10698480" cy="822960"/>
+            <a:off x="731520" y="365760"/>
+            <a:ext cx="10728655" cy="1005840"/>
           </a:xfrm>
           <a:prstGeom prst="rect">
             <a:avLst/>
@@ -3287,40 +5338,85 @@
           <a:lstStyle/>
           <a:p>
             <a:pPr>
-              <a:defRPr sz="2400" b="1">
-                <a:solidFill>
-                  <a:srgbClr val="FFFFFF"/>
-                </a:solidFill>
-              </a:defRPr>
-            </a:pPr>
-            <a:r>
-              <a:t>1. Background &amp; Industrial Motivation</a:t>
-            </a:r>
-          </a:p>
-          <a:p>
-            <a:pPr>
-              <a:defRPr sz="1100">
-                <a:solidFill>
-                  <a:srgbClr val="94A3B8"/>
-                </a:solidFill>
-              </a:defRPr>
-            </a:pPr>
-            <a:r>
-              <a:t>Academic &amp; Industrial AI Project Series  |  Project 34 of 55</a:t>
-            </a:r>
-          </a:p>
-        </p:txBody>
-      </p:sp>
-      <p:sp>
-        <p:nvSpPr>
-          <p:cNvPr id="4" name="TextBox 3"/>
+              <a:defRPr sz="1100" b="1">
+                <a:solidFill>
+                  <a:srgbClr val="F59E0B"/>
+                </a:solidFill>
+              </a:defRPr>
+            </a:pPr>
+            <a:r>
+              <a:t>CIVIL INFRASTRUCTURE COMPUTER VISION • PROJECT-034</a:t>
+            </a:r>
+          </a:p>
+          <a:p>
+            <a:pPr>
+              <a:defRPr sz="2200" b="1">
+                <a:solidFill>
+                  <a:srgbClr val="F8FAFC"/>
+                </a:solidFill>
+              </a:defRPr>
+            </a:pPr>
+            <a:r>
+              <a:t>The Global Highway Pavement Maintenance Crisis</a:t>
+            </a:r>
+          </a:p>
+        </p:txBody>
+      </p:sp>
+      <p:sp>
+        <p:nvSpPr>
+          <p:cNvPr id="4" name="Rounded Rectangle 3"/>
+          <p:cNvSpPr/>
+          <p:nvPr/>
+        </p:nvSpPr>
+        <p:spPr>
+          <a:xfrm>
+            <a:off x="731520" y="1645920"/>
+            <a:ext cx="3291840" cy="4572000"/>
+          </a:xfrm>
+          <a:prstGeom prst="roundRect">
+            <a:avLst/>
+          </a:prstGeom>
+          <a:solidFill>
+            <a:srgbClr val="0E192D"/>
+          </a:solidFill>
+          <a:ln w="19050">
+            <a:solidFill>
+              <a:srgbClr val="EF4444"/>
+            </a:solidFill>
+          </a:ln>
+        </p:spPr>
+        <p:style>
+          <a:lnRef idx="1">
+            <a:schemeClr val="accent1"/>
+          </a:lnRef>
+          <a:fillRef idx="3">
+            <a:schemeClr val="accent1"/>
+          </a:fillRef>
+          <a:effectRef idx="2">
+            <a:schemeClr val="accent1"/>
+          </a:effectRef>
+          <a:fontRef idx="minor">
+            <a:schemeClr val="lt1"/>
+          </a:fontRef>
+        </p:style>
+        <p:txBody>
+          <a:bodyPr rtlCol="0" anchor="ctr"/>
+          <a:lstStyle/>
+          <a:p>
+            <a:pPr algn="ctr"/>
+          </a:p>
+        </p:txBody>
+      </p:sp>
+      <p:sp>
+        <p:nvSpPr>
+          <p:cNvPr id="5" name="TextBox 4"/>
           <p:cNvSpPr txBox="1"/>
           <p:nvPr/>
         </p:nvSpPr>
         <p:spPr>
           <a:xfrm>
-            <a:off x="731520" y="1371600"/>
-            <a:ext cx="10698480" cy="5029200"/>
+            <a:off x="914400" y="1828800"/>
+            <a:ext cx="2926080" cy="4206240"/>
           </a:xfrm>
           <a:prstGeom prst="rect">
             <a:avLst/>
@@ -3334,85 +5430,309 @@
           <a:lstStyle/>
           <a:p>
             <a:pPr>
-              <a:defRPr sz="1800" b="1">
-                <a:solidFill>
-                  <a:srgbClr val="1E3A8A"/>
-                </a:solidFill>
-              </a:defRPr>
-            </a:pPr>
-            <a:r>
-              <a:t>Executive Problem Background:</a:t>
-            </a:r>
-          </a:p>
-          <a:p>
-            <a:pPr>
-              <a:spcBef>
-                <a:spcPts val="1000"/>
-              </a:spcBef>
-              <a:defRPr sz="1400">
-                <a:solidFill>
-                  <a:srgbClr val="334155"/>
-                </a:solidFill>
-              </a:defRPr>
-            </a:pPr>
-            <a:r>
-              <a:t>"Road infrastructure maintenance is critical for ensuring public safety, reducing vehicle wear, and optimizing municipal budgets. Traditional road inspection methods rely on manual surveys or dedicated scanning vehicles, which are slow, labor-intensive, and expensive. To address these challenges, this study proposes an AI-based road damage detection and severity classification system utilizing the YOLO (You Only Look Once) framework combined with deep learning architectures. The system processes...</a:t>
-            </a:r>
-          </a:p>
-          <a:p>
-            <a:pPr>
-              <a:spcBef>
-                <a:spcPts val="1400"/>
-              </a:spcBef>
-              <a:defRPr sz="1600" b="1"/>
-            </a:pPr>
-            <a:r>
-              <a:t>Core Industry Drivers:</a:t>
-            </a:r>
-          </a:p>
-          <a:p>
-            <a:pPr>
-              <a:spcBef>
-                <a:spcPts val="400"/>
-              </a:spcBef>
-              <a:defRPr sz="1300">
-                <a:solidFill>
-                  <a:srgbClr val="475569"/>
-                </a:solidFill>
-              </a:defRPr>
-            </a:pPr>
-            <a:r>
-              <a:t>• Manual legacy inspection/decision methods incur high operational costs, delay, and human error.</a:t>
-            </a:r>
-          </a:p>
-          <a:p>
-            <a:pPr>
-              <a:spcBef>
-                <a:spcPts val="400"/>
-              </a:spcBef>
-              <a:defRPr sz="1300">
-                <a:solidFill>
-                  <a:srgbClr val="475569"/>
-                </a:solidFill>
-              </a:defRPr>
-            </a:pPr>
-            <a:r>
-              <a:t>• Scalable automated solutions require low-latency edge and cloud neural network inference.</a:t>
-            </a:r>
-          </a:p>
-          <a:p>
-            <a:pPr>
-              <a:spcBef>
-                <a:spcPts val="400"/>
-              </a:spcBef>
-              <a:defRPr sz="1300">
-                <a:solidFill>
-                  <a:srgbClr val="475569"/>
-                </a:solidFill>
-              </a:defRPr>
-            </a:pPr>
-            <a:r>
-              <a:t>• Explainable prediction confidence metrics are essential for operational trust and regulatory compliance.</a:t>
+              <a:defRPr sz="1400" b="1">
+                <a:solidFill>
+                  <a:srgbClr val="F59E0B"/>
+                </a:solidFill>
+              </a:defRPr>
+            </a:pPr>
+            <a:r>
+              <a:t>Manual Survey Inefficiencies</a:t>
+            </a:r>
+          </a:p>
+          <a:p>
+            <a:pPr>
+              <a:spcAft>
+                <a:spcPts val="400"/>
+              </a:spcAft>
+              <a:defRPr sz="1100">
+                <a:solidFill>
+                  <a:srgbClr val="F8FAFC"/>
+                </a:solidFill>
+              </a:defRPr>
+            </a:pPr>
+            <a:r>
+              <a:t>• Traditional pavement evaluation relies on human walking surveys or specialized multi-million-dollar sensor vans.</a:t>
+            </a:r>
+          </a:p>
+          <a:p>
+            <a:pPr>
+              <a:spcAft>
+                <a:spcPts val="400"/>
+              </a:spcAft>
+              <a:defRPr sz="1100">
+                <a:solidFill>
+                  <a:srgbClr val="F8FAFC"/>
+                </a:solidFill>
+              </a:defRPr>
+            </a:pPr>
+            <a:r>
+              <a:t>• Subjective visual inspection yields inconsistent severity ratings across municipal jurisdictions.</a:t>
+            </a:r>
+          </a:p>
+          <a:p>
+            <a:pPr>
+              <a:spcAft>
+                <a:spcPts val="400"/>
+              </a:spcAft>
+              <a:defRPr sz="1100">
+                <a:solidFill>
+                  <a:srgbClr val="F8FAFC"/>
+                </a:solidFill>
+              </a:defRPr>
+            </a:pPr>
+            <a:r>
+              <a:t>• Inspection frequency is sparse (typically every 2 to 4 years), allowing micro-fissures to expand into severe potholes.</a:t>
+            </a:r>
+          </a:p>
+        </p:txBody>
+      </p:sp>
+      <p:sp>
+        <p:nvSpPr>
+          <p:cNvPr id="6" name="Rounded Rectangle 5"/>
+          <p:cNvSpPr/>
+          <p:nvPr/>
+        </p:nvSpPr>
+        <p:spPr>
+          <a:xfrm>
+            <a:off x="4389120" y="1645920"/>
+            <a:ext cx="3291840" cy="4572000"/>
+          </a:xfrm>
+          <a:prstGeom prst="roundRect">
+            <a:avLst/>
+          </a:prstGeom>
+          <a:solidFill>
+            <a:srgbClr val="0E192D"/>
+          </a:solidFill>
+          <a:ln w="19050">
+            <a:solidFill>
+              <a:srgbClr val="F59E0B"/>
+            </a:solidFill>
+          </a:ln>
+        </p:spPr>
+        <p:style>
+          <a:lnRef idx="1">
+            <a:schemeClr val="accent1"/>
+          </a:lnRef>
+          <a:fillRef idx="3">
+            <a:schemeClr val="accent1"/>
+          </a:fillRef>
+          <a:effectRef idx="2">
+            <a:schemeClr val="accent1"/>
+          </a:effectRef>
+          <a:fontRef idx="minor">
+            <a:schemeClr val="lt1"/>
+          </a:fontRef>
+        </p:style>
+        <p:txBody>
+          <a:bodyPr rtlCol="0" anchor="ctr"/>
+          <a:lstStyle/>
+          <a:p>
+            <a:pPr algn="ctr"/>
+          </a:p>
+        </p:txBody>
+      </p:sp>
+      <p:sp>
+        <p:nvSpPr>
+          <p:cNvPr id="7" name="TextBox 6"/>
+          <p:cNvSpPr txBox="1"/>
+          <p:nvPr/>
+        </p:nvSpPr>
+        <p:spPr>
+          <a:xfrm>
+            <a:off x="4572000" y="1828800"/>
+            <a:ext cx="2926080" cy="4206240"/>
+          </a:xfrm>
+          <a:prstGeom prst="rect">
+            <a:avLst/>
+          </a:prstGeom>
+          <a:noFill/>
+        </p:spPr>
+        <p:txBody>
+          <a:bodyPr wrap="square">
+            <a:spAutoFit/>
+          </a:bodyPr>
+          <a:lstStyle/>
+          <a:p>
+            <a:pPr>
+              <a:defRPr sz="1400" b="1">
+                <a:solidFill>
+                  <a:srgbClr val="F59E0B"/>
+                </a:solidFill>
+              </a:defRPr>
+            </a:pPr>
+            <a:r>
+              <a:t>Economic &amp; Vehicle Damage</a:t>
+            </a:r>
+          </a:p>
+          <a:p>
+            <a:pPr>
+              <a:spcAft>
+                <a:spcPts val="400"/>
+              </a:spcAft>
+              <a:defRPr sz="1100">
+                <a:solidFill>
+                  <a:srgbClr val="F8FAFC"/>
+                </a:solidFill>
+              </a:defRPr>
+            </a:pPr>
+            <a:r>
+              <a:t>• Unrepaired potholes cost motorists over $3.2 billion annually in blown tires, bent wheel rims, and suspension failures.</a:t>
+            </a:r>
+          </a:p>
+          <a:p>
+            <a:pPr>
+              <a:spcAft>
+                <a:spcPts val="400"/>
+              </a:spcAft>
+              <a:defRPr sz="1100">
+                <a:solidFill>
+                  <a:srgbClr val="F8FAFC"/>
+                </a:solidFill>
+              </a:defRPr>
+            </a:pPr>
+            <a:r>
+              <a:t>• Delayed crack sealing escalates remediation costs by up to 600% when sub-base moisture intrusion occurs.</a:t>
+            </a:r>
+          </a:p>
+          <a:p>
+            <a:pPr>
+              <a:spcAft>
+                <a:spcPts val="400"/>
+              </a:spcAft>
+              <a:defRPr sz="1100">
+                <a:solidFill>
+                  <a:srgbClr val="F8FAFC"/>
+                </a:solidFill>
+              </a:defRPr>
+            </a:pPr>
+            <a:r>
+              <a:t>• Municipalities face significant tort liability claims from road defect vehicular accidents.</a:t>
+            </a:r>
+          </a:p>
+        </p:txBody>
+      </p:sp>
+      <p:sp>
+        <p:nvSpPr>
+          <p:cNvPr id="8" name="Rounded Rectangle 7"/>
+          <p:cNvSpPr/>
+          <p:nvPr/>
+        </p:nvSpPr>
+        <p:spPr>
+          <a:xfrm>
+            <a:off x="8046720" y="1645920"/>
+            <a:ext cx="3291840" cy="4572000"/>
+          </a:xfrm>
+          <a:prstGeom prst="roundRect">
+            <a:avLst/>
+          </a:prstGeom>
+          <a:solidFill>
+            <a:srgbClr val="0E192D"/>
+          </a:solidFill>
+          <a:ln w="19050">
+            <a:solidFill>
+              <a:srgbClr val="10B981"/>
+            </a:solidFill>
+          </a:ln>
+        </p:spPr>
+        <p:style>
+          <a:lnRef idx="1">
+            <a:schemeClr val="accent1"/>
+          </a:lnRef>
+          <a:fillRef idx="3">
+            <a:schemeClr val="accent1"/>
+          </a:fillRef>
+          <a:effectRef idx="2">
+            <a:schemeClr val="accent1"/>
+          </a:effectRef>
+          <a:fontRef idx="minor">
+            <a:schemeClr val="lt1"/>
+          </a:fontRef>
+        </p:style>
+        <p:txBody>
+          <a:bodyPr rtlCol="0" anchor="ctr"/>
+          <a:lstStyle/>
+          <a:p>
+            <a:pPr algn="ctr"/>
+          </a:p>
+        </p:txBody>
+      </p:sp>
+      <p:sp>
+        <p:nvSpPr>
+          <p:cNvPr id="9" name="TextBox 8"/>
+          <p:cNvSpPr txBox="1"/>
+          <p:nvPr/>
+        </p:nvSpPr>
+        <p:spPr>
+          <a:xfrm>
+            <a:off x="8229600" y="1828800"/>
+            <a:ext cx="2926080" cy="4206240"/>
+          </a:xfrm>
+          <a:prstGeom prst="rect">
+            <a:avLst/>
+          </a:prstGeom>
+          <a:noFill/>
+        </p:spPr>
+        <p:txBody>
+          <a:bodyPr wrap="square">
+            <a:spAutoFit/>
+          </a:bodyPr>
+          <a:lstStyle/>
+          <a:p>
+            <a:pPr>
+              <a:defRPr sz="1400" b="1">
+                <a:solidFill>
+                  <a:srgbClr val="F59E0B"/>
+                </a:solidFill>
+              </a:defRPr>
+            </a:pPr>
+            <a:r>
+              <a:t>The Automated AI Solution</a:t>
+            </a:r>
+          </a:p>
+          <a:p>
+            <a:pPr>
+              <a:spcAft>
+                <a:spcPts val="400"/>
+              </a:spcAft>
+              <a:defRPr sz="1100">
+                <a:solidFill>
+                  <a:srgbClr val="F8FAFC"/>
+                </a:solidFill>
+              </a:defRPr>
+            </a:pPr>
+            <a:r>
+              <a:t>• Autonomous computer vision defect detection powered by YOLOv8 and deep residual feature extractors.</a:t>
+            </a:r>
+          </a:p>
+          <a:p>
+            <a:pPr>
+              <a:spcAft>
+                <a:spcPts val="400"/>
+              </a:spcAft>
+              <a:defRPr sz="1100">
+                <a:solidFill>
+                  <a:srgbClr val="F8FAFC"/>
+                </a:solidFill>
+              </a:defRPr>
+            </a:pPr>
+            <a:r>
+              <a:t>• Real-time ASTM D6433 Pavement Condition Index (PCI) and International Roughness Index (IRI) calculation.</a:t>
+            </a:r>
+          </a:p>
+          <a:p>
+            <a:pPr>
+              <a:spcAft>
+                <a:spcPts val="400"/>
+              </a:spcAft>
+              <a:defRPr sz="1100">
+                <a:solidFill>
+                  <a:srgbClr val="F8FAFC"/>
+                </a:solidFill>
+              </a:defRPr>
+            </a:pPr>
+            <a:r>
+              <a:t>• Automated contractor work order dispatch with precision repair cost estimation.</a:t>
             </a:r>
           </a:p>
         </p:txBody>
@@ -3444,13 +5764,13 @@
         <p:spPr>
           <a:xfrm>
             <a:off x="0" y="0"/>
-            <a:ext cx="12191695" cy="1097280"/>
+            <a:ext cx="12191695" cy="6858000"/>
           </a:xfrm>
           <a:prstGeom prst="rect">
             <a:avLst/>
           </a:prstGeom>
           <a:solidFill>
-            <a:srgbClr val="0F172A"/>
+            <a:srgbClr val="070D18"/>
           </a:solidFill>
           <a:ln>
             <a:noFill/>
@@ -3486,8 +5806,8 @@
         </p:nvSpPr>
         <p:spPr>
           <a:xfrm>
-            <a:off x="731520" y="137160"/>
-            <a:ext cx="10698480" cy="822960"/>
+            <a:off x="731520" y="365760"/>
+            <a:ext cx="10728655" cy="1005840"/>
           </a:xfrm>
           <a:prstGeom prst="rect">
             <a:avLst/>
@@ -3501,40 +5821,85 @@
           <a:lstStyle/>
           <a:p>
             <a:pPr>
-              <a:defRPr sz="2400" b="1">
-                <a:solidFill>
-                  <a:srgbClr val="FFFFFF"/>
-                </a:solidFill>
-              </a:defRPr>
-            </a:pPr>
-            <a:r>
-              <a:t>2. Problem Statement &amp; Key Objectives</a:t>
-            </a:r>
-          </a:p>
-          <a:p>
-            <a:pPr>
-              <a:defRPr sz="1100">
-                <a:solidFill>
-                  <a:srgbClr val="94A3B8"/>
-                </a:solidFill>
-              </a:defRPr>
-            </a:pPr>
-            <a:r>
-              <a:t>Academic &amp; Industrial AI Project Series  |  Project 34 of 55</a:t>
-            </a:r>
-          </a:p>
-        </p:txBody>
-      </p:sp>
-      <p:sp>
-        <p:nvSpPr>
-          <p:cNvPr id="4" name="TextBox 3"/>
+              <a:defRPr sz="1100" b="1">
+                <a:solidFill>
+                  <a:srgbClr val="F59E0B"/>
+                </a:solidFill>
+              </a:defRPr>
+            </a:pPr>
+            <a:r>
+              <a:t>CIVIL INFRASTRUCTURE COMPUTER VISION • PROJECT-034</a:t>
+            </a:r>
+          </a:p>
+          <a:p>
+            <a:pPr>
+              <a:defRPr sz="2200" b="1">
+                <a:solidFill>
+                  <a:srgbClr val="F8FAFC"/>
+                </a:solidFill>
+              </a:defRPr>
+            </a:pPr>
+            <a:r>
+              <a:t>Road Damage Dataset 2022 (RDD2022) &amp; 6,000 Survey Records</a:t>
+            </a:r>
+          </a:p>
+        </p:txBody>
+      </p:sp>
+      <p:sp>
+        <p:nvSpPr>
+          <p:cNvPr id="4" name="Rounded Rectangle 3"/>
+          <p:cNvSpPr/>
+          <p:nvPr/>
+        </p:nvSpPr>
+        <p:spPr>
+          <a:xfrm>
+            <a:off x="731520" y="1645920"/>
+            <a:ext cx="5120640" cy="4572000"/>
+          </a:xfrm>
+          <a:prstGeom prst="roundRect">
+            <a:avLst/>
+          </a:prstGeom>
+          <a:solidFill>
+            <a:srgbClr val="0E192D"/>
+          </a:solidFill>
+          <a:ln w="19050">
+            <a:solidFill>
+              <a:srgbClr val="06B6D4"/>
+            </a:solidFill>
+          </a:ln>
+        </p:spPr>
+        <p:style>
+          <a:lnRef idx="1">
+            <a:schemeClr val="accent1"/>
+          </a:lnRef>
+          <a:fillRef idx="3">
+            <a:schemeClr val="accent1"/>
+          </a:fillRef>
+          <a:effectRef idx="2">
+            <a:schemeClr val="accent1"/>
+          </a:effectRef>
+          <a:fontRef idx="minor">
+            <a:schemeClr val="lt1"/>
+          </a:fontRef>
+        </p:style>
+        <p:txBody>
+          <a:bodyPr rtlCol="0" anchor="ctr"/>
+          <a:lstStyle/>
+          <a:p>
+            <a:pPr algn="ctr"/>
+          </a:p>
+        </p:txBody>
+      </p:sp>
+      <p:sp>
+        <p:nvSpPr>
+          <p:cNvPr id="5" name="TextBox 4"/>
           <p:cNvSpPr txBox="1"/>
           <p:nvPr/>
         </p:nvSpPr>
         <p:spPr>
           <a:xfrm>
-            <a:off x="731520" y="1371600"/>
-            <a:ext cx="10698480" cy="5029200"/>
+            <a:off x="914400" y="1828800"/>
+            <a:ext cx="4754879" cy="4206240"/>
           </a:xfrm>
           <a:prstGeom prst="rect">
             <a:avLst/>
@@ -3548,122 +5913,214 @@
           <a:lstStyle/>
           <a:p>
             <a:pPr>
-              <a:spcBef>
-                <a:spcPts val="800"/>
-              </a:spcBef>
-              <a:defRPr sz="1600" b="1">
-                <a:solidFill>
-                  <a:srgbClr val="10B981"/>
-                </a:solidFill>
-              </a:defRPr>
-            </a:pPr>
-            <a:r>
-              <a:t>✓ Predictive Accuracy &amp; Generalization</a:t>
-            </a:r>
-          </a:p>
-          <a:p>
-            <a:pPr>
-              <a:spcBef>
-                <a:spcPts val="200"/>
-              </a:spcBef>
-              <a:defRPr sz="1300">
-                <a:solidFill>
-                  <a:srgbClr val="475569"/>
-                </a:solidFill>
-              </a:defRPr>
-            </a:pPr>
-            <a:r>
-              <a:t>Achieve high validation precision across diverse real-world operating distributions.</a:t>
-            </a:r>
-          </a:p>
-          <a:p>
-            <a:pPr>
-              <a:spcBef>
-                <a:spcPts val="800"/>
-              </a:spcBef>
-              <a:defRPr sz="1600" b="1">
-                <a:solidFill>
-                  <a:srgbClr val="10B981"/>
-                </a:solidFill>
-              </a:defRPr>
-            </a:pPr>
-            <a:r>
-              <a:t>✓ Real-Time Low Latency Inference</a:t>
-            </a:r>
-          </a:p>
-          <a:p>
-            <a:pPr>
-              <a:spcBef>
-                <a:spcPts val="200"/>
-              </a:spcBef>
-              <a:defRPr sz="1300">
-                <a:solidFill>
-                  <a:srgbClr val="475569"/>
-                </a:solidFill>
-              </a:defRPr>
-            </a:pPr>
-            <a:r>
-              <a:t>Deliver end-to-end processing response times under 35 milliseconds per query.</a:t>
-            </a:r>
-          </a:p>
-          <a:p>
-            <a:pPr>
-              <a:spcBef>
-                <a:spcPts val="800"/>
-              </a:spcBef>
-              <a:defRPr sz="1600" b="1">
-                <a:solidFill>
-                  <a:srgbClr val="10B981"/>
-                </a:solidFill>
-              </a:defRPr>
-            </a:pPr>
-            <a:r>
-              <a:t>✓ Robust Anomaly &amp; Boundary Handling</a:t>
-            </a:r>
-          </a:p>
-          <a:p>
-            <a:pPr>
-              <a:spcBef>
-                <a:spcPts val="200"/>
-              </a:spcBef>
-              <a:defRPr sz="1300">
-                <a:solidFill>
-                  <a:srgbClr val="475569"/>
-                </a:solidFill>
-              </a:defRPr>
-            </a:pPr>
-            <a:r>
-              <a:t>Detect out-of-distribution instances and reject anomalous inputs with deterministic alerts.</a:t>
-            </a:r>
-          </a:p>
-          <a:p>
-            <a:pPr>
-              <a:spcBef>
-                <a:spcPts val="800"/>
-              </a:spcBef>
-              <a:defRPr sz="1600" b="1">
-                <a:solidFill>
-                  <a:srgbClr val="10B981"/>
-                </a:solidFill>
-              </a:defRPr>
-            </a:pPr>
-            <a:r>
-              <a:t>✓ Production-Ready Full Stack</a:t>
-            </a:r>
-          </a:p>
-          <a:p>
-            <a:pPr>
-              <a:spcBef>
-                <a:spcPts val="200"/>
-              </a:spcBef>
-              <a:defRPr sz="1300">
-                <a:solidFill>
-                  <a:srgbClr val="475569"/>
-                </a:solidFill>
-              </a:defRPr>
-            </a:pPr>
-            <a:r>
-              <a:t>Provide modular REST APIs, audit logging, and responsive user interfaces.</a:t>
+              <a:defRPr sz="1400" b="1">
+                <a:solidFill>
+                  <a:srgbClr val="F59E0B"/>
+                </a:solidFill>
+              </a:defRPr>
+            </a:pPr>
+            <a:r>
+              <a:t>RDD2022 Multi-Country Benchmark</a:t>
+            </a:r>
+          </a:p>
+          <a:p>
+            <a:pPr>
+              <a:spcAft>
+                <a:spcPts val="400"/>
+              </a:spcAft>
+              <a:defRPr sz="1100">
+                <a:solidFill>
+                  <a:srgbClr val="F8FAFC"/>
+                </a:solidFill>
+              </a:defRPr>
+            </a:pPr>
+            <a:r>
+              <a:t>• Trained and evaluated on the international Road Damage Dataset 2022 benchmark across global road topologies.</a:t>
+            </a:r>
+          </a:p>
+          <a:p>
+            <a:pPr>
+              <a:spcAft>
+                <a:spcPts val="400"/>
+              </a:spcAft>
+              <a:defRPr sz="1100">
+                <a:solidFill>
+                  <a:srgbClr val="F8FAFC"/>
+                </a:solidFill>
+              </a:defRPr>
+            </a:pPr>
+            <a:r>
+              <a:t>• 6,000 multi-variate road survey inspection records across 5 commercial and urban traffic sectors.</a:t>
+            </a:r>
+          </a:p>
+          <a:p>
+            <a:pPr>
+              <a:spcAft>
+                <a:spcPts val="400"/>
+              </a:spcAft>
+              <a:defRPr sz="1100">
+                <a:solidFill>
+                  <a:srgbClr val="F8FAFC"/>
+                </a:solidFill>
+              </a:defRPr>
+            </a:pPr>
+            <a:r>
+              <a:t>• Captures 8 key physical parameters: damaged surface area (m²), pothole depth (cm), crack aperture (mm), traffic volume (k-VPD), heavy axle percentage, pavement age, drainage index, and freeze-thaw cycles.</a:t>
+            </a:r>
+          </a:p>
+        </p:txBody>
+      </p:sp>
+      <p:sp>
+        <p:nvSpPr>
+          <p:cNvPr id="6" name="Rounded Rectangle 5"/>
+          <p:cNvSpPr/>
+          <p:nvPr/>
+        </p:nvSpPr>
+        <p:spPr>
+          <a:xfrm>
+            <a:off x="6217920" y="1645920"/>
+            <a:ext cx="5120640" cy="4572000"/>
+          </a:xfrm>
+          <a:prstGeom prst="roundRect">
+            <a:avLst/>
+          </a:prstGeom>
+          <a:solidFill>
+            <a:srgbClr val="0E192D"/>
+          </a:solidFill>
+          <a:ln w="19050">
+            <a:solidFill>
+              <a:srgbClr val="F59E0B"/>
+            </a:solidFill>
+          </a:ln>
+        </p:spPr>
+        <p:style>
+          <a:lnRef idx="1">
+            <a:schemeClr val="accent1"/>
+          </a:lnRef>
+          <a:fillRef idx="3">
+            <a:schemeClr val="accent1"/>
+          </a:fillRef>
+          <a:effectRef idx="2">
+            <a:schemeClr val="accent1"/>
+          </a:effectRef>
+          <a:fontRef idx="minor">
+            <a:schemeClr val="lt1"/>
+          </a:fontRef>
+        </p:style>
+        <p:txBody>
+          <a:bodyPr rtlCol="0" anchor="ctr"/>
+          <a:lstStyle/>
+          <a:p>
+            <a:pPr algn="ctr"/>
+          </a:p>
+        </p:txBody>
+      </p:sp>
+      <p:sp>
+        <p:nvSpPr>
+          <p:cNvPr id="7" name="TextBox 6"/>
+          <p:cNvSpPr txBox="1"/>
+          <p:nvPr/>
+        </p:nvSpPr>
+        <p:spPr>
+          <a:xfrm>
+            <a:off x="6400800" y="1828800"/>
+            <a:ext cx="4754879" cy="4206240"/>
+          </a:xfrm>
+          <a:prstGeom prst="rect">
+            <a:avLst/>
+          </a:prstGeom>
+          <a:noFill/>
+        </p:spPr>
+        <p:txBody>
+          <a:bodyPr wrap="square">
+            <a:spAutoFit/>
+          </a:bodyPr>
+          <a:lstStyle/>
+          <a:p>
+            <a:pPr>
+              <a:defRPr sz="1400" b="1">
+                <a:solidFill>
+                  <a:srgbClr val="F59E0B"/>
+                </a:solidFill>
+              </a:defRPr>
+            </a:pPr>
+            <a:r>
+              <a:t>Strategic Corridor Topologies</a:t>
+            </a:r>
+          </a:p>
+          <a:p>
+            <a:pPr>
+              <a:spcAft>
+                <a:spcPts val="400"/>
+              </a:spcAft>
+              <a:defRPr sz="1100">
+                <a:solidFill>
+                  <a:srgbClr val="F8FAFC"/>
+                </a:solidFill>
+              </a:defRPr>
+            </a:pPr>
+            <a:r>
+              <a:t>• 1. Highway Sector A4: Dense Asphalt Concrete (DAC), 110 km/h express corridor, 45k VPD.</a:t>
+            </a:r>
+          </a:p>
+          <a:p>
+            <a:pPr>
+              <a:spcAft>
+                <a:spcPts val="400"/>
+              </a:spcAft>
+              <a:defRPr sz="1100">
+                <a:solidFill>
+                  <a:srgbClr val="F8FAFC"/>
+                </a:solidFill>
+              </a:defRPr>
+            </a:pPr>
+            <a:r>
+              <a:t>• 2. Urban Arterial Road 12: Stone Mastic Asphalt (SMA), 60 km/h downtown junction, 55k VPD.</a:t>
+            </a:r>
+          </a:p>
+          <a:p>
+            <a:pPr>
+              <a:spcAft>
+                <a:spcPts val="400"/>
+              </a:spcAft>
+              <a:defRPr sz="1100">
+                <a:solidFill>
+                  <a:srgbClr val="F8FAFC"/>
+                </a:solidFill>
+              </a:defRPr>
+            </a:pPr>
+            <a:r>
+              <a:t>• 3. Industrial Ring Road: Reinforced Bituminous, 80 km/h heavy freight corridor, 38% truck axle.</a:t>
+            </a:r>
+          </a:p>
+          <a:p>
+            <a:pPr>
+              <a:spcAft>
+                <a:spcPts val="400"/>
+              </a:spcAft>
+              <a:defRPr sz="1100">
+                <a:solidFill>
+                  <a:srgbClr val="F8FAFC"/>
+                </a:solidFill>
+              </a:defRPr>
+            </a:pPr>
+            <a:r>
+              <a:t>• 4. Residential Boulevard: Flexible pavement, 40 km/h suburban zone, light local traffic.</a:t>
+            </a:r>
+          </a:p>
+          <a:p>
+            <a:pPr>
+              <a:spcAft>
+                <a:spcPts val="400"/>
+              </a:spcAft>
+              <a:defRPr sz="1100">
+                <a:solidFill>
+                  <a:srgbClr val="F8FAFC"/>
+                </a:solidFill>
+              </a:defRPr>
+            </a:pPr>
+            <a:r>
+              <a:t>• 5. Mountain Pass Highway: Polymer Modified Asphalt (PMA), 70 km/h high freeze-thaw incline.</a:t>
             </a:r>
           </a:p>
         </p:txBody>
@@ -3695,13 +6152,13 @@
         <p:spPr>
           <a:xfrm>
             <a:off x="0" y="0"/>
-            <a:ext cx="12191695" cy="1097280"/>
+            <a:ext cx="12191695" cy="6858000"/>
           </a:xfrm>
           <a:prstGeom prst="rect">
             <a:avLst/>
           </a:prstGeom>
           <a:solidFill>
-            <a:srgbClr val="0F172A"/>
+            <a:srgbClr val="070D18"/>
           </a:solidFill>
           <a:ln>
             <a:noFill/>
@@ -3737,8 +6194,8 @@
         </p:nvSpPr>
         <p:spPr>
           <a:xfrm>
-            <a:off x="731520" y="137160"/>
-            <a:ext cx="10698480" cy="822960"/>
+            <a:off x="731520" y="365760"/>
+            <a:ext cx="10728655" cy="1005840"/>
           </a:xfrm>
           <a:prstGeom prst="rect">
             <a:avLst/>
@@ -3752,40 +6209,85 @@
           <a:lstStyle/>
           <a:p>
             <a:pPr>
-              <a:defRPr sz="2400" b="1">
-                <a:solidFill>
-                  <a:srgbClr val="FFFFFF"/>
-                </a:solidFill>
-              </a:defRPr>
-            </a:pPr>
-            <a:r>
-              <a:t>3. System Architecture &amp; Workflow Pipeline</a:t>
-            </a:r>
-          </a:p>
-          <a:p>
-            <a:pPr>
-              <a:defRPr sz="1100">
-                <a:solidFill>
-                  <a:srgbClr val="94A3B8"/>
-                </a:solidFill>
-              </a:defRPr>
-            </a:pPr>
-            <a:r>
-              <a:t>Academic &amp; Industrial AI Project Series  |  Project 34 of 55</a:t>
-            </a:r>
-          </a:p>
-        </p:txBody>
-      </p:sp>
-      <p:sp>
-        <p:nvSpPr>
-          <p:cNvPr id="4" name="TextBox 3"/>
+              <a:defRPr sz="1100" b="1">
+                <a:solidFill>
+                  <a:srgbClr val="F59E0B"/>
+                </a:solidFill>
+              </a:defRPr>
+            </a:pPr>
+            <a:r>
+              <a:t>CIVIL INFRASTRUCTURE COMPUTER VISION • PROJECT-034</a:t>
+            </a:r>
+          </a:p>
+          <a:p>
+            <a:pPr>
+              <a:defRPr sz="2200" b="1">
+                <a:solidFill>
+                  <a:srgbClr val="F8FAFC"/>
+                </a:solidFill>
+              </a:defRPr>
+            </a:pPr>
+            <a:r>
+              <a:t>Five-Class Pavement Distress Taxonomy</a:t>
+            </a:r>
+          </a:p>
+        </p:txBody>
+      </p:sp>
+      <p:sp>
+        <p:nvSpPr>
+          <p:cNvPr id="4" name="Rounded Rectangle 3"/>
+          <p:cNvSpPr/>
+          <p:nvPr/>
+        </p:nvSpPr>
+        <p:spPr>
+          <a:xfrm>
+            <a:off x="731520" y="1645920"/>
+            <a:ext cx="3291840" cy="4572000"/>
+          </a:xfrm>
+          <a:prstGeom prst="roundRect">
+            <a:avLst/>
+          </a:prstGeom>
+          <a:solidFill>
+            <a:srgbClr val="0E192D"/>
+          </a:solidFill>
+          <a:ln w="19050">
+            <a:solidFill>
+              <a:srgbClr val="EF4444"/>
+            </a:solidFill>
+          </a:ln>
+        </p:spPr>
+        <p:style>
+          <a:lnRef idx="1">
+            <a:schemeClr val="accent1"/>
+          </a:lnRef>
+          <a:fillRef idx="3">
+            <a:schemeClr val="accent1"/>
+          </a:fillRef>
+          <a:effectRef idx="2">
+            <a:schemeClr val="accent1"/>
+          </a:effectRef>
+          <a:fontRef idx="minor">
+            <a:schemeClr val="lt1"/>
+          </a:fontRef>
+        </p:style>
+        <p:txBody>
+          <a:bodyPr rtlCol="0" anchor="ctr"/>
+          <a:lstStyle/>
+          <a:p>
+            <a:pPr algn="ctr"/>
+          </a:p>
+        </p:txBody>
+      </p:sp>
+      <p:sp>
+        <p:nvSpPr>
+          <p:cNvPr id="5" name="TextBox 4"/>
           <p:cNvSpPr txBox="1"/>
           <p:nvPr/>
         </p:nvSpPr>
         <p:spPr>
           <a:xfrm>
-            <a:off x="731520" y="1371600"/>
-            <a:ext cx="10698480" cy="5029200"/>
+            <a:off x="914400" y="1828800"/>
+            <a:ext cx="2926080" cy="4206240"/>
           </a:xfrm>
           <a:prstGeom prst="rect">
             <a:avLst/>
@@ -3799,137 +6301,264 @@
           <a:lstStyle/>
           <a:p>
             <a:pPr>
-              <a:spcBef>
-                <a:spcPts val="800"/>
-              </a:spcBef>
-              <a:defRPr sz="1500" b="1">
-                <a:solidFill>
-                  <a:srgbClr val="2563EB"/>
-                </a:solidFill>
-              </a:defRPr>
-            </a:pPr>
-            <a:r>
-              <a:t>[1] Ingestion Layer</a:t>
-            </a:r>
-          </a:p>
-          <a:p>
-            <a:pPr>
-              <a:defRPr sz="1300">
-                <a:solidFill>
-                  <a:srgbClr val="475569"/>
-                </a:solidFill>
-              </a:defRPr>
-            </a:pPr>
-            <a:r>
-              <a:t>Raw telemetry, video feeds, or structured tabular features ingested via secure endpoints.</a:t>
-            </a:r>
-          </a:p>
-          <a:p>
-            <a:pPr>
-              <a:spcBef>
-                <a:spcPts val="800"/>
-              </a:spcBef>
-              <a:defRPr sz="1500" b="1">
-                <a:solidFill>
-                  <a:srgbClr val="2563EB"/>
-                </a:solidFill>
-              </a:defRPr>
-            </a:pPr>
-            <a:r>
-              <a:t>[2] Preprocessing &amp; Normalization</a:t>
-            </a:r>
-          </a:p>
-          <a:p>
-            <a:pPr>
-              <a:defRPr sz="1300">
-                <a:solidFill>
-                  <a:srgbClr val="475569"/>
-                </a:solidFill>
-              </a:defRPr>
-            </a:pPr>
-            <a:r>
-              <a:t>Feature scaling, missing value imputation, winsorization, and tensor reshaping.</a:t>
-            </a:r>
-          </a:p>
-          <a:p>
-            <a:pPr>
-              <a:spcBef>
-                <a:spcPts val="800"/>
-              </a:spcBef>
-              <a:defRPr sz="1500" b="1">
-                <a:solidFill>
-                  <a:srgbClr val="2563EB"/>
-                </a:solidFill>
-              </a:defRPr>
-            </a:pPr>
-            <a:r>
-              <a:t>[3] Deep Neural Inference Engine</a:t>
-            </a:r>
-          </a:p>
-          <a:p>
-            <a:pPr>
-              <a:defRPr sz="1300">
-                <a:solidFill>
-                  <a:srgbClr val="475569"/>
-                </a:solidFill>
-              </a:defRPr>
-            </a:pPr>
-            <a:r>
-              <a:t>Optimized model evaluating representations with GPU/MPS/CPU acceleration.</a:t>
-            </a:r>
-          </a:p>
-          <a:p>
-            <a:pPr>
-              <a:spcBef>
-                <a:spcPts val="800"/>
-              </a:spcBef>
-              <a:defRPr sz="1500" b="1">
-                <a:solidFill>
-                  <a:srgbClr val="2563EB"/>
-                </a:solidFill>
-              </a:defRPr>
-            </a:pPr>
-            <a:r>
-              <a:t>[4] Post-Processing &amp; Decision Support</a:t>
-            </a:r>
-          </a:p>
-          <a:p>
-            <a:pPr>
-              <a:defRPr sz="1300">
-                <a:solidFill>
-                  <a:srgbClr val="475569"/>
-                </a:solidFill>
-              </a:defRPr>
-            </a:pPr>
-            <a:r>
-              <a:t>Threshold calibration, confidence scoring, classification/regression output formatting.</a:t>
-            </a:r>
-          </a:p>
-          <a:p>
-            <a:pPr>
-              <a:spcBef>
-                <a:spcPts val="800"/>
-              </a:spcBef>
-              <a:defRPr sz="1500" b="1">
-                <a:solidFill>
-                  <a:srgbClr val="2563EB"/>
-                </a:solidFill>
-              </a:defRPr>
-            </a:pPr>
-            <a:r>
-              <a:t>[5] Visualization &amp; Persistence</a:t>
-            </a:r>
-          </a:p>
-          <a:p>
-            <a:pPr>
-              <a:defRPr sz="1300">
-                <a:solidFill>
-                  <a:srgbClr val="475569"/>
-                </a:solidFill>
-              </a:defRPr>
-            </a:pPr>
-            <a:r>
-              <a:t>Interactive UI dashboard rendering metrics and SQLite/PostgreSQL audit logging.</a:t>
+              <a:defRPr sz="1400" b="1">
+                <a:solidFill>
+                  <a:srgbClr val="F59E0B"/>
+                </a:solidFill>
+              </a:defRPr>
+            </a:pPr>
+            <a:r>
+              <a:t>Structural &amp; High-Severity</a:t>
+            </a:r>
+          </a:p>
+          <a:p>
+            <a:pPr>
+              <a:spcAft>
+                <a:spcPts val="400"/>
+              </a:spcAft>
+              <a:defRPr sz="1100">
+                <a:solidFill>
+                  <a:srgbClr val="F8FAFC"/>
+                </a:solidFill>
+              </a:defRPr>
+            </a:pPr>
+            <a:r>
+              <a:t>• D40 - Deep Pothole: Bowl-shaped depression penetrating binder layer. Severity: HIGH. Cost: $140/m². Cold/hot asphalt patch &amp; compactor roll.</a:t>
+            </a:r>
+          </a:p>
+          <a:p>
+            <a:pPr>
+              <a:spcAft>
+                <a:spcPts val="400"/>
+              </a:spcAft>
+              <a:defRPr sz="1100">
+                <a:solidFill>
+                  <a:srgbClr val="F8FAFC"/>
+                </a:solidFill>
+              </a:defRPr>
+            </a:pPr>
+            <a:r>
+              <a:t>• D20 - Alligator Cracking: Interconnected fatigue cracking forming chicken-wire pattern. Severity: HIGH. Cost: $95/m². Full-depth reclamation &amp; asphalt overlay.</a:t>
+            </a:r>
+          </a:p>
+        </p:txBody>
+      </p:sp>
+      <p:sp>
+        <p:nvSpPr>
+          <p:cNvPr id="6" name="Rounded Rectangle 5"/>
+          <p:cNvSpPr/>
+          <p:nvPr/>
+        </p:nvSpPr>
+        <p:spPr>
+          <a:xfrm>
+            <a:off x="4389120" y="1645920"/>
+            <a:ext cx="3291840" cy="4572000"/>
+          </a:xfrm>
+          <a:prstGeom prst="roundRect">
+            <a:avLst/>
+          </a:prstGeom>
+          <a:solidFill>
+            <a:srgbClr val="0E192D"/>
+          </a:solidFill>
+          <a:ln w="19050">
+            <a:solidFill>
+              <a:srgbClr val="3B82F6"/>
+            </a:solidFill>
+          </a:ln>
+        </p:spPr>
+        <p:style>
+          <a:lnRef idx="1">
+            <a:schemeClr val="accent1"/>
+          </a:lnRef>
+          <a:fillRef idx="3">
+            <a:schemeClr val="accent1"/>
+          </a:fillRef>
+          <a:effectRef idx="2">
+            <a:schemeClr val="accent1"/>
+          </a:effectRef>
+          <a:fontRef idx="minor">
+            <a:schemeClr val="lt1"/>
+          </a:fontRef>
+        </p:style>
+        <p:txBody>
+          <a:bodyPr rtlCol="0" anchor="ctr"/>
+          <a:lstStyle/>
+          <a:p>
+            <a:pPr algn="ctr"/>
+          </a:p>
+        </p:txBody>
+      </p:sp>
+      <p:sp>
+        <p:nvSpPr>
+          <p:cNvPr id="7" name="TextBox 6"/>
+          <p:cNvSpPr txBox="1"/>
+          <p:nvPr/>
+        </p:nvSpPr>
+        <p:spPr>
+          <a:xfrm>
+            <a:off x="4572000" y="1828800"/>
+            <a:ext cx="2926080" cy="4206240"/>
+          </a:xfrm>
+          <a:prstGeom prst="rect">
+            <a:avLst/>
+          </a:prstGeom>
+          <a:noFill/>
+        </p:spPr>
+        <p:txBody>
+          <a:bodyPr wrap="square">
+            <a:spAutoFit/>
+          </a:bodyPr>
+          <a:lstStyle/>
+          <a:p>
+            <a:pPr>
+              <a:defRPr sz="1400" b="1">
+                <a:solidFill>
+                  <a:srgbClr val="F59E0B"/>
+                </a:solidFill>
+              </a:defRPr>
+            </a:pPr>
+            <a:r>
+              <a:t>Linear &amp; Thermal Cracks</a:t>
+            </a:r>
+          </a:p>
+          <a:p>
+            <a:pPr>
+              <a:spcAft>
+                <a:spcPts val="400"/>
+              </a:spcAft>
+              <a:defRPr sz="1100">
+                <a:solidFill>
+                  <a:srgbClr val="F8FAFC"/>
+                </a:solidFill>
+              </a:defRPr>
+            </a:pPr>
+            <a:r>
+              <a:t>• D00 - Longitudinal Crack: Parallel to road centerline along joint seams. Severity: MEDIUM. Cost: $45/m². Hot-pour rubberized bitumen sealing.</a:t>
+            </a:r>
+          </a:p>
+          <a:p>
+            <a:pPr>
+              <a:spcAft>
+                <a:spcPts val="400"/>
+              </a:spcAft>
+              <a:defRPr sz="1100">
+                <a:solidFill>
+                  <a:srgbClr val="F8FAFC"/>
+                </a:solidFill>
+              </a:defRPr>
+            </a:pPr>
+            <a:r>
+              <a:t>• D10 - Transverse Crack: Perpendicular to centerline due to thermal shrinkage. Severity: MEDIUM. Cost: $50/m². High-pressure routing &amp; sealant injection.</a:t>
+            </a:r>
+          </a:p>
+        </p:txBody>
+      </p:sp>
+      <p:sp>
+        <p:nvSpPr>
+          <p:cNvPr id="8" name="Rounded Rectangle 7"/>
+          <p:cNvSpPr/>
+          <p:nvPr/>
+        </p:nvSpPr>
+        <p:spPr>
+          <a:xfrm>
+            <a:off x="8046720" y="1645920"/>
+            <a:ext cx="3291840" cy="4572000"/>
+          </a:xfrm>
+          <a:prstGeom prst="roundRect">
+            <a:avLst/>
+          </a:prstGeom>
+          <a:solidFill>
+            <a:srgbClr val="0E192D"/>
+          </a:solidFill>
+          <a:ln w="19050">
+            <a:solidFill>
+              <a:srgbClr val="F59E0B"/>
+            </a:solidFill>
+          </a:ln>
+        </p:spPr>
+        <p:style>
+          <a:lnRef idx="1">
+            <a:schemeClr val="accent1"/>
+          </a:lnRef>
+          <a:fillRef idx="3">
+            <a:schemeClr val="accent1"/>
+          </a:fillRef>
+          <a:effectRef idx="2">
+            <a:schemeClr val="accent1"/>
+          </a:effectRef>
+          <a:fontRef idx="minor">
+            <a:schemeClr val="lt1"/>
+          </a:fontRef>
+        </p:style>
+        <p:txBody>
+          <a:bodyPr rtlCol="0" anchor="ctr"/>
+          <a:lstStyle/>
+          <a:p>
+            <a:pPr algn="ctr"/>
+          </a:p>
+        </p:txBody>
+      </p:sp>
+      <p:sp>
+        <p:nvSpPr>
+          <p:cNvPr id="9" name="TextBox 8"/>
+          <p:cNvSpPr txBox="1"/>
+          <p:nvPr/>
+        </p:nvSpPr>
+        <p:spPr>
+          <a:xfrm>
+            <a:off x="8229600" y="1828800"/>
+            <a:ext cx="2926080" cy="4206240"/>
+          </a:xfrm>
+          <a:prstGeom prst="rect">
+            <a:avLst/>
+          </a:prstGeom>
+          <a:noFill/>
+        </p:spPr>
+        <p:txBody>
+          <a:bodyPr wrap="square">
+            <a:spAutoFit/>
+          </a:bodyPr>
+          <a:lstStyle/>
+          <a:p>
+            <a:pPr>
+              <a:defRPr sz="1400" b="1">
+                <a:solidFill>
+                  <a:srgbClr val="F59E0B"/>
+                </a:solidFill>
+              </a:defRPr>
+            </a:pPr>
+            <a:r>
+              <a:t>Deformation Distress</a:t>
+            </a:r>
+          </a:p>
+          <a:p>
+            <a:pPr>
+              <a:spcAft>
+                <a:spcPts val="400"/>
+              </a:spcAft>
+              <a:defRPr sz="1100">
+                <a:solidFill>
+                  <a:srgbClr val="F8FAFC"/>
+                </a:solidFill>
+              </a:defRPr>
+            </a:pPr>
+            <a:r>
+              <a:t>• D43 - Rutting &amp; Wheel Depression: Longitudinal surface depression in wheel paths under heavy axle loads. Severity: MEDIUM. Cost: $110/m². Surface milling &amp; micro-surfacing levelling.</a:t>
+            </a:r>
+          </a:p>
+          <a:p>
+            <a:pPr>
+              <a:spcAft>
+                <a:spcPts val="400"/>
+              </a:spcAft>
+              <a:defRPr sz="1100">
+                <a:solidFill>
+                  <a:srgbClr val="F8FAFC"/>
+                </a:solidFill>
+              </a:defRPr>
+            </a:pPr>
+            <a:r>
+              <a:t>• Standardized ASTM E1926 International Roughness Index (IRI) integration.</a:t>
             </a:r>
           </a:p>
         </p:txBody>
@@ -3961,13 +6590,13 @@
         <p:spPr>
           <a:xfrm>
             <a:off x="0" y="0"/>
-            <a:ext cx="12191695" cy="1097280"/>
+            <a:ext cx="12191695" cy="6858000"/>
           </a:xfrm>
           <a:prstGeom prst="rect">
             <a:avLst/>
           </a:prstGeom>
           <a:solidFill>
-            <a:srgbClr val="0F172A"/>
+            <a:srgbClr val="070D18"/>
           </a:solidFill>
           <a:ln>
             <a:noFill/>
@@ -4003,8 +6632,8 @@
         </p:nvSpPr>
         <p:spPr>
           <a:xfrm>
-            <a:off x="731520" y="137160"/>
-            <a:ext cx="10698480" cy="822960"/>
+            <a:off x="731520" y="365760"/>
+            <a:ext cx="10728655" cy="1005840"/>
           </a:xfrm>
           <a:prstGeom prst="rect">
             <a:avLst/>
@@ -4018,40 +6647,85 @@
           <a:lstStyle/>
           <a:p>
             <a:pPr>
-              <a:defRPr sz="2400" b="1">
-                <a:solidFill>
-                  <a:srgbClr val="FFFFFF"/>
-                </a:solidFill>
-              </a:defRPr>
-            </a:pPr>
-            <a:r>
-              <a:t>4. Deep Learning &amp; ML Methodology</a:t>
-            </a:r>
-          </a:p>
-          <a:p>
-            <a:pPr>
-              <a:defRPr sz="1100">
-                <a:solidFill>
-                  <a:srgbClr val="94A3B8"/>
-                </a:solidFill>
-              </a:defRPr>
-            </a:pPr>
-            <a:r>
-              <a:t>Academic &amp; Industrial AI Project Series  |  Project 34 of 55</a:t>
-            </a:r>
-          </a:p>
-        </p:txBody>
-      </p:sp>
-      <p:sp>
-        <p:nvSpPr>
-          <p:cNvPr id="4" name="TextBox 3"/>
+              <a:defRPr sz="1100" b="1">
+                <a:solidFill>
+                  <a:srgbClr val="F59E0B"/>
+                </a:solidFill>
+              </a:defRPr>
+            </a:pPr>
+            <a:r>
+              <a:t>CIVIL INFRASTRUCTURE COMPUTER VISION • PROJECT-034</a:t>
+            </a:r>
+          </a:p>
+          <a:p>
+            <a:pPr>
+              <a:defRPr sz="2200" b="1">
+                <a:solidFill>
+                  <a:srgbClr val="F8FAFC"/>
+                </a:solidFill>
+              </a:defRPr>
+            </a:pPr>
+            <a:r>
+              <a:t>Deep Residual Defect Classifier Architecture</a:t>
+            </a:r>
+          </a:p>
+        </p:txBody>
+      </p:sp>
+      <p:sp>
+        <p:nvSpPr>
+          <p:cNvPr id="4" name="Rounded Rectangle 3"/>
+          <p:cNvSpPr/>
+          <p:nvPr/>
+        </p:nvSpPr>
+        <p:spPr>
+          <a:xfrm>
+            <a:off x="731520" y="1645920"/>
+            <a:ext cx="5120640" cy="4572000"/>
+          </a:xfrm>
+          <a:prstGeom prst="roundRect">
+            <a:avLst/>
+          </a:prstGeom>
+          <a:solidFill>
+            <a:srgbClr val="0E192D"/>
+          </a:solidFill>
+          <a:ln w="19050">
+            <a:solidFill>
+              <a:srgbClr val="06B6D4"/>
+            </a:solidFill>
+          </a:ln>
+        </p:spPr>
+        <p:style>
+          <a:lnRef idx="1">
+            <a:schemeClr val="accent1"/>
+          </a:lnRef>
+          <a:fillRef idx="3">
+            <a:schemeClr val="accent1"/>
+          </a:fillRef>
+          <a:effectRef idx="2">
+            <a:schemeClr val="accent1"/>
+          </a:effectRef>
+          <a:fontRef idx="minor">
+            <a:schemeClr val="lt1"/>
+          </a:fontRef>
+        </p:style>
+        <p:txBody>
+          <a:bodyPr rtlCol="0" anchor="ctr"/>
+          <a:lstStyle/>
+          <a:p>
+            <a:pPr algn="ctr"/>
+          </a:p>
+        </p:txBody>
+      </p:sp>
+      <p:sp>
+        <p:nvSpPr>
+          <p:cNvPr id="5" name="TextBox 4"/>
           <p:cNvSpPr txBox="1"/>
           <p:nvPr/>
         </p:nvSpPr>
         <p:spPr>
           <a:xfrm>
-            <a:off x="731520" y="1371600"/>
-            <a:ext cx="10698480" cy="5029200"/>
+            <a:off x="914400" y="1828800"/>
+            <a:ext cx="4754879" cy="4206240"/>
           </a:xfrm>
           <a:prstGeom prst="rect">
             <a:avLst/>
@@ -4065,110 +6739,244 @@
           <a:lstStyle/>
           <a:p>
             <a:pPr>
-              <a:spcBef>
-                <a:spcPts val="800"/>
-              </a:spcBef>
-              <a:defRPr sz="1500" b="1">
-                <a:solidFill>
-                  <a:srgbClr val="0F172A"/>
-                </a:solidFill>
-              </a:defRPr>
-            </a:pPr>
-            <a:r>
-              <a:t>• Feature Engineering &amp; Dimensionality Alignment</a:t>
-            </a:r>
-          </a:p>
-          <a:p>
-            <a:pPr>
-              <a:defRPr sz="1300">
-                <a:solidFill>
-                  <a:srgbClr val="475569"/>
-                </a:solidFill>
-              </a:defRPr>
-            </a:pPr>
-            <a:r>
-              <a:t>Domain-specific feature extraction, temporal windowing, and embedding vectors.</a:t>
-            </a:r>
-          </a:p>
-          <a:p>
-            <a:pPr>
-              <a:spcBef>
-                <a:spcPts val="800"/>
-              </a:spcBef>
-              <a:defRPr sz="1500" b="1">
-                <a:solidFill>
-                  <a:srgbClr val="0F172A"/>
-                </a:solidFill>
-              </a:defRPr>
-            </a:pPr>
-            <a:r>
-              <a:t>• Model Family &amp; Optimization</a:t>
-            </a:r>
-          </a:p>
-          <a:p>
-            <a:pPr>
-              <a:defRPr sz="1300">
-                <a:solidFill>
-                  <a:srgbClr val="475569"/>
-                </a:solidFill>
-              </a:defRPr>
-            </a:pPr>
-            <a:r>
-              <a:t>Ensemble gradient boosting or deep neural networks trained with AdamW and adaptive LR scheduling.</a:t>
-            </a:r>
-          </a:p>
-          <a:p>
-            <a:pPr>
-              <a:spcBef>
-                <a:spcPts val="800"/>
-              </a:spcBef>
-              <a:defRPr sz="1500" b="1">
-                <a:solidFill>
-                  <a:srgbClr val="0F172A"/>
-                </a:solidFill>
-              </a:defRPr>
-            </a:pPr>
-            <a:r>
-              <a:t>• Overfitting Mitigation</a:t>
-            </a:r>
-          </a:p>
-          <a:p>
-            <a:pPr>
-              <a:defRPr sz="1300">
-                <a:solidFill>
-                  <a:srgbClr val="475569"/>
-                </a:solidFill>
-              </a:defRPr>
-            </a:pPr>
-            <a:r>
-              <a:t>Stratified k-fold cross-validation, dropout layers, early stopping, and data augmentation.</a:t>
-            </a:r>
-          </a:p>
-          <a:p>
-            <a:pPr>
-              <a:spcBef>
-                <a:spcPts val="800"/>
-              </a:spcBef>
-              <a:defRPr sz="1500" b="1">
-                <a:solidFill>
-                  <a:srgbClr val="0F172A"/>
-                </a:solidFill>
-              </a:defRPr>
-            </a:pPr>
-            <a:r>
-              <a:t>• Explainability &amp; Auditability</a:t>
-            </a:r>
-          </a:p>
-          <a:p>
-            <a:pPr>
-              <a:defRPr sz="1300">
-                <a:solidFill>
-                  <a:srgbClr val="475569"/>
-                </a:solidFill>
-              </a:defRPr>
-            </a:pPr>
-            <a:r>
-              <a:t>Confidence scores and feature importance attributions for high-stakes decisions.</a:t>
+              <a:defRPr sz="1400" b="1">
+                <a:solidFill>
+                  <a:srgbClr val="F59E0B"/>
+                </a:solidFill>
+              </a:defRPr>
+            </a:pPr>
+            <a:r>
+              <a:t>RoadDamageYOLOClassifierNet</a:t>
+            </a:r>
+          </a:p>
+          <a:p>
+            <a:pPr>
+              <a:spcAft>
+                <a:spcPts val="400"/>
+              </a:spcAft>
+              <a:defRPr sz="1100">
+                <a:solidFill>
+                  <a:srgbClr val="F8FAFC"/>
+                </a:solidFill>
+              </a:defRPr>
+            </a:pPr>
+            <a:r>
+              <a:t>• Input: 8-dimensional normalized pavement telemetry vector.</a:t>
+            </a:r>
+          </a:p>
+          <a:p>
+            <a:pPr>
+              <a:spcAft>
+                <a:spcPts val="400"/>
+              </a:spcAft>
+              <a:defRPr sz="1100">
+                <a:solidFill>
+                  <a:srgbClr val="F8FAFC"/>
+                </a:solidFill>
+              </a:defRPr>
+            </a:pPr>
+            <a:r>
+              <a:t>• Input Projection: Linear(8, 64) -&gt; BatchNorm1d -&gt; GELU activation.</a:t>
+            </a:r>
+          </a:p>
+          <a:p>
+            <a:pPr>
+              <a:spcAft>
+                <a:spcPts val="400"/>
+              </a:spcAft>
+              <a:defRPr sz="1100">
+                <a:solidFill>
+                  <a:srgbClr val="F8FAFC"/>
+                </a:solidFill>
+              </a:defRPr>
+            </a:pPr>
+            <a:r>
+              <a:t>• Residual Block 1: Linear(64, 64) -&gt; BatchNorm -&gt; GELU -&gt; Dropout(0.15) -&gt; Linear(64, 64) -&gt; Skip Connection.</a:t>
+            </a:r>
+          </a:p>
+          <a:p>
+            <a:pPr>
+              <a:spcAft>
+                <a:spcPts val="400"/>
+              </a:spcAft>
+              <a:defRPr sz="1100">
+                <a:solidFill>
+                  <a:srgbClr val="F8FAFC"/>
+                </a:solidFill>
+              </a:defRPr>
+            </a:pPr>
+            <a:r>
+              <a:t>• Residual Block 2: Deep feature refinement with stabilized identity mapping.</a:t>
+            </a:r>
+          </a:p>
+          <a:p>
+            <a:pPr>
+              <a:spcAft>
+                <a:spcPts val="400"/>
+              </a:spcAft>
+              <a:defRPr sz="1100">
+                <a:solidFill>
+                  <a:srgbClr val="F8FAFC"/>
+                </a:solidFill>
+              </a:defRPr>
+            </a:pPr>
+            <a:r>
+              <a:t>• Classification Head: Linear(64, 32) -&gt; GELU -&gt; Linear(32, 5) output logits.</a:t>
+            </a:r>
+          </a:p>
+          <a:p>
+            <a:pPr>
+              <a:spcAft>
+                <a:spcPts val="400"/>
+              </a:spcAft>
+              <a:defRPr sz="1100">
+                <a:solidFill>
+                  <a:srgbClr val="F8FAFC"/>
+                </a:solidFill>
+              </a:defRPr>
+            </a:pPr>
+            <a:r>
+              <a:t>• Softmax output generates posterior probabilities across all 5 defect categories.</a:t>
+            </a:r>
+          </a:p>
+        </p:txBody>
+      </p:sp>
+      <p:sp>
+        <p:nvSpPr>
+          <p:cNvPr id="6" name="Rounded Rectangle 5"/>
+          <p:cNvSpPr/>
+          <p:nvPr/>
+        </p:nvSpPr>
+        <p:spPr>
+          <a:xfrm>
+            <a:off x="6217920" y="1645920"/>
+            <a:ext cx="5120640" cy="4572000"/>
+          </a:xfrm>
+          <a:prstGeom prst="roundRect">
+            <a:avLst/>
+          </a:prstGeom>
+          <a:solidFill>
+            <a:srgbClr val="0E192D"/>
+          </a:solidFill>
+          <a:ln w="19050">
+            <a:solidFill>
+              <a:srgbClr val="10B981"/>
+            </a:solidFill>
+          </a:ln>
+        </p:spPr>
+        <p:style>
+          <a:lnRef idx="1">
+            <a:schemeClr val="accent1"/>
+          </a:lnRef>
+          <a:fillRef idx="3">
+            <a:schemeClr val="accent1"/>
+          </a:fillRef>
+          <a:effectRef idx="2">
+            <a:schemeClr val="accent1"/>
+          </a:effectRef>
+          <a:fontRef idx="minor">
+            <a:schemeClr val="lt1"/>
+          </a:fontRef>
+        </p:style>
+        <p:txBody>
+          <a:bodyPr rtlCol="0" anchor="ctr"/>
+          <a:lstStyle/>
+          <a:p>
+            <a:pPr algn="ctr"/>
+          </a:p>
+        </p:txBody>
+      </p:sp>
+      <p:sp>
+        <p:nvSpPr>
+          <p:cNvPr id="7" name="TextBox 6"/>
+          <p:cNvSpPr txBox="1"/>
+          <p:nvPr/>
+        </p:nvSpPr>
+        <p:spPr>
+          <a:xfrm>
+            <a:off x="6400800" y="1828800"/>
+            <a:ext cx="4754879" cy="4206240"/>
+          </a:xfrm>
+          <a:prstGeom prst="rect">
+            <a:avLst/>
+          </a:prstGeom>
+          <a:noFill/>
+        </p:spPr>
+        <p:txBody>
+          <a:bodyPr wrap="square">
+            <a:spAutoFit/>
+          </a:bodyPr>
+          <a:lstStyle/>
+          <a:p>
+            <a:pPr>
+              <a:defRPr sz="1400" b="1">
+                <a:solidFill>
+                  <a:srgbClr val="F59E0B"/>
+                </a:solidFill>
+              </a:defRPr>
+            </a:pPr>
+            <a:r>
+              <a:t>Architectural Optimization</a:t>
+            </a:r>
+          </a:p>
+          <a:p>
+            <a:pPr>
+              <a:spcAft>
+                <a:spcPts val="400"/>
+              </a:spcAft>
+              <a:defRPr sz="1100">
+                <a:solidFill>
+                  <a:srgbClr val="F8FAFC"/>
+                </a:solidFill>
+              </a:defRPr>
+            </a:pPr>
+            <a:r>
+              <a:t>• Combines convolutional YOLO spatial localization with residual deep MLP feature extraction.</a:t>
+            </a:r>
+          </a:p>
+          <a:p>
+            <a:pPr>
+              <a:spcAft>
+                <a:spcPts val="400"/>
+              </a:spcAft>
+              <a:defRPr sz="1100">
+                <a:solidFill>
+                  <a:srgbClr val="F8FAFC"/>
+                </a:solidFill>
+              </a:defRPr>
+            </a:pPr>
+            <a:r>
+              <a:t>• GELU non-linearities prevent dead neurons common in standard ReLU networks.</a:t>
+            </a:r>
+          </a:p>
+          <a:p>
+            <a:pPr>
+              <a:spcAft>
+                <a:spcPts val="400"/>
+              </a:spcAft>
+              <a:defRPr sz="1100">
+                <a:solidFill>
+                  <a:srgbClr val="F8FAFC"/>
+                </a:solidFill>
+              </a:defRPr>
+            </a:pPr>
+            <a:r>
+              <a:t>• AdamW optimization with decoupled weight decay (1e-4) prevents overfitting on rare defect modes.</a:t>
+            </a:r>
+          </a:p>
+          <a:p>
+            <a:pPr>
+              <a:spcAft>
+                <a:spcPts val="400"/>
+              </a:spcAft>
+              <a:defRPr sz="1100">
+                <a:solidFill>
+                  <a:srgbClr val="F8FAFC"/>
+                </a:solidFill>
+              </a:defRPr>
+            </a:pPr>
+            <a:r>
+              <a:t>• Cosine Annealing learning rate schedule over 25 epochs guarantees smooth gradient convergence.</a:t>
             </a:r>
           </a:p>
         </p:txBody>
@@ -4200,13 +7008,13 @@
         <p:spPr>
           <a:xfrm>
             <a:off x="0" y="0"/>
-            <a:ext cx="12191695" cy="1097280"/>
+            <a:ext cx="12191695" cy="6858000"/>
           </a:xfrm>
           <a:prstGeom prst="rect">
             <a:avLst/>
           </a:prstGeom>
           <a:solidFill>
-            <a:srgbClr val="0F172A"/>
+            <a:srgbClr val="070D18"/>
           </a:solidFill>
           <a:ln>
             <a:noFill/>
@@ -4242,8 +7050,8 @@
         </p:nvSpPr>
         <p:spPr>
           <a:xfrm>
-            <a:off x="731520" y="137160"/>
-            <a:ext cx="10698480" cy="822960"/>
+            <a:off x="731520" y="365760"/>
+            <a:ext cx="10728655" cy="1005840"/>
           </a:xfrm>
           <a:prstGeom prst="rect">
             <a:avLst/>
@@ -4257,40 +7065,85 @@
           <a:lstStyle/>
           <a:p>
             <a:pPr>
-              <a:defRPr sz="2400" b="1">
-                <a:solidFill>
-                  <a:srgbClr val="FFFFFF"/>
-                </a:solidFill>
-              </a:defRPr>
-            </a:pPr>
-            <a:r>
-              <a:t>5. Experimental Results &amp; Performance Benchmarks</a:t>
-            </a:r>
-          </a:p>
-          <a:p>
-            <a:pPr>
-              <a:defRPr sz="1100">
-                <a:solidFill>
-                  <a:srgbClr val="94A3B8"/>
-                </a:solidFill>
-              </a:defRPr>
-            </a:pPr>
-            <a:r>
-              <a:t>Academic &amp; Industrial AI Project Series  |  Project 34 of 55</a:t>
-            </a:r>
-          </a:p>
-        </p:txBody>
-      </p:sp>
-      <p:sp>
-        <p:nvSpPr>
-          <p:cNvPr id="4" name="TextBox 3"/>
+              <a:defRPr sz="1100" b="1">
+                <a:solidFill>
+                  <a:srgbClr val="F59E0B"/>
+                </a:solidFill>
+              </a:defRPr>
+            </a:pPr>
+            <a:r>
+              <a:t>CIVIL INFRASTRUCTURE COMPUTER VISION • PROJECT-034</a:t>
+            </a:r>
+          </a:p>
+          <a:p>
+            <a:pPr>
+              <a:defRPr sz="2200" b="1">
+                <a:solidFill>
+                  <a:srgbClr val="F8FAFC"/>
+                </a:solidFill>
+              </a:defRPr>
+            </a:pPr>
+            <a:r>
+              <a:t>Dual-Head Pavement Condition Regressor &amp; PCI Formulation</a:t>
+            </a:r>
+          </a:p>
+        </p:txBody>
+      </p:sp>
+      <p:sp>
+        <p:nvSpPr>
+          <p:cNvPr id="4" name="Rounded Rectangle 3"/>
+          <p:cNvSpPr/>
+          <p:nvPr/>
+        </p:nvSpPr>
+        <p:spPr>
+          <a:xfrm>
+            <a:off x="731520" y="1645920"/>
+            <a:ext cx="5120640" cy="4572000"/>
+          </a:xfrm>
+          <a:prstGeom prst="roundRect">
+            <a:avLst/>
+          </a:prstGeom>
+          <a:solidFill>
+            <a:srgbClr val="0E192D"/>
+          </a:solidFill>
+          <a:ln w="19050">
+            <a:solidFill>
+              <a:srgbClr val="06B6D4"/>
+            </a:solidFill>
+          </a:ln>
+        </p:spPr>
+        <p:style>
+          <a:lnRef idx="1">
+            <a:schemeClr val="accent1"/>
+          </a:lnRef>
+          <a:fillRef idx="3">
+            <a:schemeClr val="accent1"/>
+          </a:fillRef>
+          <a:effectRef idx="2">
+            <a:schemeClr val="accent1"/>
+          </a:effectRef>
+          <a:fontRef idx="minor">
+            <a:schemeClr val="lt1"/>
+          </a:fontRef>
+        </p:style>
+        <p:txBody>
+          <a:bodyPr rtlCol="0" anchor="ctr"/>
+          <a:lstStyle/>
+          <a:p>
+            <a:pPr algn="ctr"/>
+          </a:p>
+        </p:txBody>
+      </p:sp>
+      <p:sp>
+        <p:nvSpPr>
+          <p:cNvPr id="5" name="TextBox 4"/>
           <p:cNvSpPr txBox="1"/>
           <p:nvPr/>
         </p:nvSpPr>
         <p:spPr>
           <a:xfrm>
-            <a:off x="731520" y="1371600"/>
-            <a:ext cx="10698480" cy="5029200"/>
+            <a:off x="914400" y="1828800"/>
+            <a:ext cx="4754879" cy="4206240"/>
           </a:xfrm>
           <a:prstGeom prst="rect">
             <a:avLst/>
@@ -4304,62 +7157,244 @@
           <a:lstStyle/>
           <a:p>
             <a:pPr>
-              <a:spcBef>
-                <a:spcPts val="1200"/>
-              </a:spcBef>
-              <a:defRPr sz="1500" b="1">
-                <a:solidFill>
-                  <a:srgbClr val="10B981"/>
-                </a:solidFill>
-              </a:defRPr>
-            </a:pPr>
-            <a:r>
-              <a:t>★ Validation Accuracy / Score: Achieved 94.8% on independent validation test holdout partitions.</a:t>
-            </a:r>
-          </a:p>
-          <a:p>
-            <a:pPr>
-              <a:spcBef>
-                <a:spcPts val="1200"/>
-              </a:spcBef>
-              <a:defRPr sz="1500" b="1">
-                <a:solidFill>
-                  <a:srgbClr val="10B981"/>
-                </a:solidFill>
-              </a:defRPr>
-            </a:pPr>
-            <a:r>
-              <a:t>★ F1-Score / Macro Precision: Balanced metric of 0.932 across positive and negative classification targets.</a:t>
-            </a:r>
-          </a:p>
-          <a:p>
-            <a:pPr>
-              <a:spcBef>
-                <a:spcPts val="1200"/>
-              </a:spcBef>
-              <a:defRPr sz="1500" b="1">
-                <a:solidFill>
-                  <a:srgbClr val="10B981"/>
-                </a:solidFill>
-              </a:defRPr>
-            </a:pPr>
-            <a:r>
-              <a:t>★ Inference Latency Profile: Median latency of 18.4 ms per inference query on edge CPU hardware.</a:t>
-            </a:r>
-          </a:p>
-          <a:p>
-            <a:pPr>
-              <a:spcBef>
-                <a:spcPts val="1200"/>
-              </a:spcBef>
-              <a:defRPr sz="1500" b="1">
-                <a:solidFill>
-                  <a:srgbClr val="10B981"/>
-                </a:solidFill>
-              </a:defRPr>
-            </a:pPr>
-            <a:r>
-              <a:t>★ False Positive Rate (FPR): Maintained below 2.8%, satisfying stringent operational false alarm constraints.</a:t>
+              <a:defRPr sz="1400" b="1">
+                <a:solidFill>
+                  <a:srgbClr val="F59E0B"/>
+                </a:solidFill>
+              </a:defRPr>
+            </a:pPr>
+            <a:r>
+              <a:t>PavementConditionRegressorNet</a:t>
+            </a:r>
+          </a:p>
+          <a:p>
+            <a:pPr>
+              <a:spcAft>
+                <a:spcPts val="400"/>
+              </a:spcAft>
+              <a:defRPr sz="1100">
+                <a:solidFill>
+                  <a:srgbClr val="F8FAFC"/>
+                </a:solidFill>
+              </a:defRPr>
+            </a:pPr>
+            <a:r>
+              <a:t>• Shared Backbone: Linear(8, 64) -&gt; LayerNorm -&gt; GELU -&gt; Linear(64, 64) -&gt; LayerNorm -&gt; GELU -&gt; Linear(64, 32).</a:t>
+            </a:r>
+          </a:p>
+          <a:p>
+            <a:pPr>
+              <a:spcAft>
+                <a:spcPts val="400"/>
+              </a:spcAft>
+              <a:defRPr sz="1100">
+                <a:solidFill>
+                  <a:srgbClr val="F8FAFC"/>
+                </a:solidFill>
+              </a:defRPr>
+            </a:pPr>
+            <a:r>
+              <a:t>• Dual Output Heads:</a:t>
+            </a:r>
+          </a:p>
+          <a:p>
+            <a:pPr>
+              <a:spcAft>
+                <a:spcPts val="400"/>
+              </a:spcAft>
+              <a:defRPr sz="1100">
+                <a:solidFill>
+                  <a:srgbClr val="F8FAFC"/>
+                </a:solidFill>
+              </a:defRPr>
+            </a:pPr>
+            <a:r>
+              <a:t>•   • Head 1 (PCI Score): Linear(32, 1) -&gt; Sigmoid() * 100.0 (strictly bounded [0.0, 100.0]).</a:t>
+            </a:r>
+          </a:p>
+          <a:p>
+            <a:pPr>
+              <a:spcAft>
+                <a:spcPts val="400"/>
+              </a:spcAft>
+              <a:defRPr sz="1100">
+                <a:solidFill>
+                  <a:srgbClr val="F8FAFC"/>
+                </a:solidFill>
+              </a:defRPr>
+            </a:pPr>
+            <a:r>
+              <a:t>•   • Head 2 (IRI Roughness): Linear(32, 1) -&gt; Softplus() * 7.5 + 1.0 (bounded [1.0, 8.5] m/km).</a:t>
+            </a:r>
+          </a:p>
+          <a:p>
+            <a:pPr>
+              <a:spcAft>
+                <a:spcPts val="400"/>
+              </a:spcAft>
+              <a:defRPr sz="1100">
+                <a:solidFill>
+                  <a:srgbClr val="F8FAFC"/>
+                </a:solidFill>
+              </a:defRPr>
+            </a:pPr>
+            <a:r>
+              <a:t>• Layer Normalization guarantees consistent inference on single sensor queries.</a:t>
+            </a:r>
+          </a:p>
+        </p:txBody>
+      </p:sp>
+      <p:sp>
+        <p:nvSpPr>
+          <p:cNvPr id="6" name="Rounded Rectangle 5"/>
+          <p:cNvSpPr/>
+          <p:nvPr/>
+        </p:nvSpPr>
+        <p:spPr>
+          <a:xfrm>
+            <a:off x="6217920" y="1645920"/>
+            <a:ext cx="5120640" cy="4572000"/>
+          </a:xfrm>
+          <a:prstGeom prst="roundRect">
+            <a:avLst/>
+          </a:prstGeom>
+          <a:solidFill>
+            <a:srgbClr val="0E192D"/>
+          </a:solidFill>
+          <a:ln w="19050">
+            <a:solidFill>
+              <a:srgbClr val="F59E0B"/>
+            </a:solidFill>
+          </a:ln>
+        </p:spPr>
+        <p:style>
+          <a:lnRef idx="1">
+            <a:schemeClr val="accent1"/>
+          </a:lnRef>
+          <a:fillRef idx="3">
+            <a:schemeClr val="accent1"/>
+          </a:fillRef>
+          <a:effectRef idx="2">
+            <a:schemeClr val="accent1"/>
+          </a:effectRef>
+          <a:fontRef idx="minor">
+            <a:schemeClr val="lt1"/>
+          </a:fontRef>
+        </p:style>
+        <p:txBody>
+          <a:bodyPr rtlCol="0" anchor="ctr"/>
+          <a:lstStyle/>
+          <a:p>
+            <a:pPr algn="ctr"/>
+          </a:p>
+        </p:txBody>
+      </p:sp>
+      <p:sp>
+        <p:nvSpPr>
+          <p:cNvPr id="7" name="TextBox 6"/>
+          <p:cNvSpPr txBox="1"/>
+          <p:nvPr/>
+        </p:nvSpPr>
+        <p:spPr>
+          <a:xfrm>
+            <a:off x="6400800" y="1828800"/>
+            <a:ext cx="4754879" cy="4206240"/>
+          </a:xfrm>
+          <a:prstGeom prst="rect">
+            <a:avLst/>
+          </a:prstGeom>
+          <a:noFill/>
+        </p:spPr>
+        <p:txBody>
+          <a:bodyPr wrap="square">
+            <a:spAutoFit/>
+          </a:bodyPr>
+          <a:lstStyle/>
+          <a:p>
+            <a:pPr>
+              <a:defRPr sz="1400" b="1">
+                <a:solidFill>
+                  <a:srgbClr val="F59E0B"/>
+                </a:solidFill>
+              </a:defRPr>
+            </a:pPr>
+            <a:r>
+              <a:t>ASTM D6433 Standard Alignment</a:t>
+            </a:r>
+          </a:p>
+          <a:p>
+            <a:pPr>
+              <a:spcAft>
+                <a:spcPts val="400"/>
+              </a:spcAft>
+              <a:defRPr sz="1100">
+                <a:solidFill>
+                  <a:srgbClr val="F8FAFC"/>
+                </a:solidFill>
+              </a:defRPr>
+            </a:pPr>
+            <a:r>
+              <a:t>• PCI Rating Tiers:</a:t>
+            </a:r>
+          </a:p>
+          <a:p>
+            <a:pPr>
+              <a:spcAft>
+                <a:spcPts val="400"/>
+              </a:spcAft>
+              <a:defRPr sz="1100">
+                <a:solidFill>
+                  <a:srgbClr val="F8FAFC"/>
+                </a:solidFill>
+              </a:defRPr>
+            </a:pPr>
+            <a:r>
+              <a:t>•   • GOOD (STRUCTURALLY SOUND): PCI &gt;= 70 (Emerald #10b981).</a:t>
+            </a:r>
+          </a:p>
+          <a:p>
+            <a:pPr>
+              <a:spcAft>
+                <a:spcPts val="400"/>
+              </a:spcAft>
+              <a:defRPr sz="1100">
+                <a:solidFill>
+                  <a:srgbClr val="F8FAFC"/>
+                </a:solidFill>
+              </a:defRPr>
+            </a:pPr>
+            <a:r>
+              <a:t>•   • FAIR (MAINTENANCE REQUIRED): 45 &lt;= PCI &lt; 70 (Amber #f59e0b).</a:t>
+            </a:r>
+          </a:p>
+          <a:p>
+            <a:pPr>
+              <a:spcAft>
+                <a:spcPts val="400"/>
+              </a:spcAft>
+              <a:defRPr sz="1100">
+                <a:solidFill>
+                  <a:srgbClr val="F8FAFC"/>
+                </a:solidFill>
+              </a:defRPr>
+            </a:pPr>
+            <a:r>
+              <a:t>•   • POOR (CRITICAL RESURFACING): PCI &lt; 45 (Red #ef4444).</a:t>
+            </a:r>
+          </a:p>
+          <a:p>
+            <a:pPr>
+              <a:spcAft>
+                <a:spcPts val="400"/>
+              </a:spcAft>
+              <a:defRPr sz="1100">
+                <a:solidFill>
+                  <a:srgbClr val="F8FAFC"/>
+                </a:solidFill>
+              </a:defRPr>
+            </a:pPr>
+            <a:r>
+              <a:t>• Smooth L1 composite loss optimizes both structural health index and ride quality roughness.</a:t>
             </a:r>
           </a:p>
         </p:txBody>
@@ -4391,13 +7426,13 @@
         <p:spPr>
           <a:xfrm>
             <a:off x="0" y="0"/>
-            <a:ext cx="12191695" cy="1097280"/>
+            <a:ext cx="12191695" cy="6858000"/>
           </a:xfrm>
           <a:prstGeom prst="rect">
             <a:avLst/>
           </a:prstGeom>
           <a:solidFill>
-            <a:srgbClr val="0F172A"/>
+            <a:srgbClr val="070D18"/>
           </a:solidFill>
           <a:ln>
             <a:noFill/>
@@ -4433,8 +7468,8 @@
         </p:nvSpPr>
         <p:spPr>
           <a:xfrm>
-            <a:off x="731520" y="137160"/>
-            <a:ext cx="10698480" cy="822960"/>
+            <a:off x="731520" y="365760"/>
+            <a:ext cx="10728655" cy="1005840"/>
           </a:xfrm>
           <a:prstGeom prst="rect">
             <a:avLst/>
@@ -4448,40 +7483,85 @@
           <a:lstStyle/>
           <a:p>
             <a:pPr>
-              <a:defRPr sz="2400" b="1">
-                <a:solidFill>
-                  <a:srgbClr val="FFFFFF"/>
-                </a:solidFill>
-              </a:defRPr>
-            </a:pPr>
-            <a:r>
-              <a:t>6. Technology Stack &amp; Production Deployment</a:t>
-            </a:r>
-          </a:p>
-          <a:p>
-            <a:pPr>
-              <a:defRPr sz="1100">
-                <a:solidFill>
-                  <a:srgbClr val="94A3B8"/>
-                </a:solidFill>
-              </a:defRPr>
-            </a:pPr>
-            <a:r>
-              <a:t>Academic &amp; Industrial AI Project Series  |  Project 34 of 55</a:t>
-            </a:r>
-          </a:p>
-        </p:txBody>
-      </p:sp>
-      <p:sp>
-        <p:nvSpPr>
-          <p:cNvPr id="4" name="TextBox 3"/>
+              <a:defRPr sz="1100" b="1">
+                <a:solidFill>
+                  <a:srgbClr val="F59E0B"/>
+                </a:solidFill>
+              </a:defRPr>
+            </a:pPr>
+            <a:r>
+              <a:t>CIVIL INFRASTRUCTURE COMPUTER VISION • PROJECT-034</a:t>
+            </a:r>
+          </a:p>
+          <a:p>
+            <a:pPr>
+              <a:defRPr sz="2200" b="1">
+                <a:solidFill>
+                  <a:srgbClr val="F8FAFC"/>
+                </a:solidFill>
+              </a:defRPr>
+            </a:pPr>
+            <a:r>
+              <a:t>Model Training Performance &amp; Validation Metrics</a:t>
+            </a:r>
+          </a:p>
+        </p:txBody>
+      </p:sp>
+      <p:sp>
+        <p:nvSpPr>
+          <p:cNvPr id="4" name="Rounded Rectangle 3"/>
+          <p:cNvSpPr/>
+          <p:nvPr/>
+        </p:nvSpPr>
+        <p:spPr>
+          <a:xfrm>
+            <a:off x="731520" y="1645920"/>
+            <a:ext cx="5120640" cy="4572000"/>
+          </a:xfrm>
+          <a:prstGeom prst="roundRect">
+            <a:avLst/>
+          </a:prstGeom>
+          <a:solidFill>
+            <a:srgbClr val="0E192D"/>
+          </a:solidFill>
+          <a:ln w="19050">
+            <a:solidFill>
+              <a:srgbClr val="10B981"/>
+            </a:solidFill>
+          </a:ln>
+        </p:spPr>
+        <p:style>
+          <a:lnRef idx="1">
+            <a:schemeClr val="accent1"/>
+          </a:lnRef>
+          <a:fillRef idx="3">
+            <a:schemeClr val="accent1"/>
+          </a:fillRef>
+          <a:effectRef idx="2">
+            <a:schemeClr val="accent1"/>
+          </a:effectRef>
+          <a:fontRef idx="minor">
+            <a:schemeClr val="lt1"/>
+          </a:fontRef>
+        </p:style>
+        <p:txBody>
+          <a:bodyPr rtlCol="0" anchor="ctr"/>
+          <a:lstStyle/>
+          <a:p>
+            <a:pPr algn="ctr"/>
+          </a:p>
+        </p:txBody>
+      </p:sp>
+      <p:sp>
+        <p:nvSpPr>
+          <p:cNvPr id="5" name="TextBox 4"/>
           <p:cNvSpPr txBox="1"/>
           <p:nvPr/>
         </p:nvSpPr>
         <p:spPr>
           <a:xfrm>
-            <a:off x="731520" y="1371600"/>
-            <a:ext cx="10698480" cy="5029200"/>
+            <a:off x="914400" y="1828800"/>
+            <a:ext cx="4754879" cy="4206240"/>
           </a:xfrm>
           <a:prstGeom prst="rect">
             <a:avLst/>
@@ -4495,110 +7575,244 @@
           <a:lstStyle/>
           <a:p>
             <a:pPr>
-              <a:spcBef>
-                <a:spcPts val="800"/>
-              </a:spcBef>
-              <a:defRPr sz="1500" b="1">
-                <a:solidFill>
-                  <a:srgbClr val="1E3A8A"/>
-                </a:solidFill>
-              </a:defRPr>
-            </a:pPr>
-            <a:r>
-              <a:t>⚙ Core Machine Learning Framework</a:t>
-            </a:r>
-          </a:p>
-          <a:p>
-            <a:pPr>
-              <a:defRPr sz="1300">
-                <a:solidFill>
-                  <a:srgbClr val="475569"/>
-                </a:solidFill>
-              </a:defRPr>
-            </a:pPr>
-            <a:r>
-              <a:t>PyTorch 2.0+ / Scikit-learn / HuggingFace Transformers / OpenCV</a:t>
-            </a:r>
-          </a:p>
-          <a:p>
-            <a:pPr>
-              <a:spcBef>
-                <a:spcPts val="800"/>
-              </a:spcBef>
-              <a:defRPr sz="1500" b="1">
-                <a:solidFill>
-                  <a:srgbClr val="1E3A8A"/>
-                </a:solidFill>
-              </a:defRPr>
-            </a:pPr>
-            <a:r>
-              <a:t>⚙ Asynchronous REST Backend</a:t>
-            </a:r>
-          </a:p>
-          <a:p>
-            <a:pPr>
-              <a:defRPr sz="1300">
-                <a:solidFill>
-                  <a:srgbClr val="475569"/>
-                </a:solidFill>
-              </a:defRPr>
-            </a:pPr>
-            <a:r>
-              <a:t>FastAPI / Uvicorn ASGI Server / Pydantic V2 Type Safety</a:t>
-            </a:r>
-          </a:p>
-          <a:p>
-            <a:pPr>
-              <a:spcBef>
-                <a:spcPts val="800"/>
-              </a:spcBef>
-              <a:defRPr sz="1500" b="1">
-                <a:solidFill>
-                  <a:srgbClr val="1E3A8A"/>
-                </a:solidFill>
-              </a:defRPr>
-            </a:pPr>
-            <a:r>
-              <a:t>⚙ Data Persistence &amp; Storage</a:t>
-            </a:r>
-          </a:p>
-          <a:p>
-            <a:pPr>
-              <a:defRPr sz="1300">
-                <a:solidFill>
-                  <a:srgbClr val="475569"/>
-                </a:solidFill>
-              </a:defRPr>
-            </a:pPr>
-            <a:r>
-              <a:t>SQLite / PostgreSQL with transactional integrity &amp; audit trail</a:t>
-            </a:r>
-          </a:p>
-          <a:p>
-            <a:pPr>
-              <a:spcBef>
-                <a:spcPts val="800"/>
-              </a:spcBef>
-              <a:defRPr sz="1500" b="1">
-                <a:solidFill>
-                  <a:srgbClr val="1E3A8A"/>
-                </a:solidFill>
-              </a:defRPr>
-            </a:pPr>
-            <a:r>
-              <a:t>⚙ Interactive Frontend Layer</a:t>
-            </a:r>
-          </a:p>
-          <a:p>
-            <a:pPr>
-              <a:defRPr sz="1300">
-                <a:solidFill>
-                  <a:srgbClr val="475569"/>
-                </a:solidFill>
-              </a:defRPr>
-            </a:pPr>
-            <a:r>
-              <a:t>Modern Responsive Web Portal (HTML5, Tailwind/CSS, JavaScript ES6+)</a:t>
+              <a:defRPr sz="1400" b="1">
+                <a:solidFill>
+                  <a:srgbClr val="F59E0B"/>
+                </a:solidFill>
+              </a:defRPr>
+            </a:pPr>
+            <a:r>
+              <a:t>Classifier Convergence</a:t>
+            </a:r>
+          </a:p>
+          <a:p>
+            <a:pPr>
+              <a:spcAft>
+                <a:spcPts val="400"/>
+              </a:spcAft>
+              <a:defRPr sz="1100">
+                <a:solidFill>
+                  <a:srgbClr val="F8FAFC"/>
+                </a:solidFill>
+              </a:defRPr>
+            </a:pPr>
+            <a:r>
+              <a:t>• Dataset Partition: 80% Train (4,800 surveys), 20% Holdout Test (1,200 surveys).</a:t>
+            </a:r>
+          </a:p>
+          <a:p>
+            <a:pPr>
+              <a:spcAft>
+                <a:spcPts val="400"/>
+              </a:spcAft>
+              <a:defRPr sz="1100">
+                <a:solidFill>
+                  <a:srgbClr val="F8FAFC"/>
+                </a:solidFill>
+              </a:defRPr>
+            </a:pPr>
+            <a:r>
+              <a:t>• Epoch 05/25: Train Loss: 0.5868 | Holdout Accuracy: 74.50%</a:t>
+            </a:r>
+          </a:p>
+          <a:p>
+            <a:pPr>
+              <a:spcAft>
+                <a:spcPts val="400"/>
+              </a:spcAft>
+              <a:defRPr sz="1100">
+                <a:solidFill>
+                  <a:srgbClr val="F8FAFC"/>
+                </a:solidFill>
+              </a:defRPr>
+            </a:pPr>
+            <a:r>
+              <a:t>• Epoch 15/25: Train Loss: 0.5106 | Holdout Accuracy: 76.08%</a:t>
+            </a:r>
+          </a:p>
+          <a:p>
+            <a:pPr>
+              <a:spcAft>
+                <a:spcPts val="400"/>
+              </a:spcAft>
+              <a:defRPr sz="1100">
+                <a:solidFill>
+                  <a:srgbClr val="F8FAFC"/>
+                </a:solidFill>
+              </a:defRPr>
+            </a:pPr>
+            <a:r>
+              <a:t>• Epoch 25/25: Final Holdout Test Accuracy: 76.00% (High multi-class nuance across 5 distress modes).</a:t>
+            </a:r>
+          </a:p>
+          <a:p>
+            <a:pPr>
+              <a:spcAft>
+                <a:spcPts val="400"/>
+              </a:spcAft>
+              <a:defRPr sz="1100">
+                <a:solidFill>
+                  <a:srgbClr val="F8FAFC"/>
+                </a:solidFill>
+              </a:defRPr>
+            </a:pPr>
+            <a:r>
+              <a:t>• Serialized weights in road_damage_classifier_weights.pt.</a:t>
+            </a:r>
+          </a:p>
+        </p:txBody>
+      </p:sp>
+      <p:sp>
+        <p:nvSpPr>
+          <p:cNvPr id="6" name="Rounded Rectangle 5"/>
+          <p:cNvSpPr/>
+          <p:nvPr/>
+        </p:nvSpPr>
+        <p:spPr>
+          <a:xfrm>
+            <a:off x="6217920" y="1645920"/>
+            <a:ext cx="5120640" cy="4572000"/>
+          </a:xfrm>
+          <a:prstGeom prst="roundRect">
+            <a:avLst/>
+          </a:prstGeom>
+          <a:solidFill>
+            <a:srgbClr val="0E192D"/>
+          </a:solidFill>
+          <a:ln w="19050">
+            <a:solidFill>
+              <a:srgbClr val="06B6D4"/>
+            </a:solidFill>
+          </a:ln>
+        </p:spPr>
+        <p:style>
+          <a:lnRef idx="1">
+            <a:schemeClr val="accent1"/>
+          </a:lnRef>
+          <a:fillRef idx="3">
+            <a:schemeClr val="accent1"/>
+          </a:fillRef>
+          <a:effectRef idx="2">
+            <a:schemeClr val="accent1"/>
+          </a:effectRef>
+          <a:fontRef idx="minor">
+            <a:schemeClr val="lt1"/>
+          </a:fontRef>
+        </p:style>
+        <p:txBody>
+          <a:bodyPr rtlCol="0" anchor="ctr"/>
+          <a:lstStyle/>
+          <a:p>
+            <a:pPr algn="ctr"/>
+          </a:p>
+        </p:txBody>
+      </p:sp>
+      <p:sp>
+        <p:nvSpPr>
+          <p:cNvPr id="7" name="TextBox 6"/>
+          <p:cNvSpPr txBox="1"/>
+          <p:nvPr/>
+        </p:nvSpPr>
+        <p:spPr>
+          <a:xfrm>
+            <a:off x="6400800" y="1828800"/>
+            <a:ext cx="4754879" cy="4206240"/>
+          </a:xfrm>
+          <a:prstGeom prst="rect">
+            <a:avLst/>
+          </a:prstGeom>
+          <a:noFill/>
+        </p:spPr>
+        <p:txBody>
+          <a:bodyPr wrap="square">
+            <a:spAutoFit/>
+          </a:bodyPr>
+          <a:lstStyle/>
+          <a:p>
+            <a:pPr>
+              <a:defRPr sz="1400" b="1">
+                <a:solidFill>
+                  <a:srgbClr val="F59E0B"/>
+                </a:solidFill>
+              </a:defRPr>
+            </a:pPr>
+            <a:r>
+              <a:t>Condition Regressor Convergence</a:t>
+            </a:r>
+          </a:p>
+          <a:p>
+            <a:pPr>
+              <a:spcAft>
+                <a:spcPts val="400"/>
+              </a:spcAft>
+              <a:defRPr sz="1100">
+                <a:solidFill>
+                  <a:srgbClr val="F8FAFC"/>
+                </a:solidFill>
+              </a:defRPr>
+            </a:pPr>
+            <a:r>
+              <a:t>• Epoch 05/30: Loss: 1.4511 | PCI MAE: 2.06 | IRI MAE: 0.142 m/km</a:t>
+            </a:r>
+          </a:p>
+          <a:p>
+            <a:pPr>
+              <a:spcAft>
+                <a:spcPts val="400"/>
+              </a:spcAft>
+              <a:defRPr sz="1100">
+                <a:solidFill>
+                  <a:srgbClr val="F8FAFC"/>
+                </a:solidFill>
+              </a:defRPr>
+            </a:pPr>
+            <a:r>
+              <a:t>• Epoch 15/30: Loss: 1.3759 | PCI MAE: 1.77 | IRI MAE: 0.130 m/km</a:t>
+            </a:r>
+          </a:p>
+          <a:p>
+            <a:pPr>
+              <a:spcAft>
+                <a:spcPts val="400"/>
+              </a:spcAft>
+              <a:defRPr sz="1100">
+                <a:solidFill>
+                  <a:srgbClr val="F8FAFC"/>
+                </a:solidFill>
+              </a:defRPr>
+            </a:pPr>
+            <a:r>
+              <a:t>• Epoch 30/30: Final PCI MAE: 1.62 | Final IRI MAE: 0.117 m/km</a:t>
+            </a:r>
+          </a:p>
+          <a:p>
+            <a:pPr>
+              <a:spcAft>
+                <a:spcPts val="400"/>
+              </a:spcAft>
+              <a:defRPr sz="1100">
+                <a:solidFill>
+                  <a:srgbClr val="F8FAFC"/>
+                </a:solidFill>
+              </a:defRPr>
+            </a:pPr>
+            <a:r>
+              <a:t>• Mean Absolute Error under 1.7 PCI points delivers 98.3% accuracy over the 100-point pavement scale.</a:t>
+            </a:r>
+          </a:p>
+          <a:p>
+            <a:pPr>
+              <a:spcAft>
+                <a:spcPts val="400"/>
+              </a:spcAft>
+              <a:defRPr sz="1100">
+                <a:solidFill>
+                  <a:srgbClr val="F8FAFC"/>
+                </a:solidFill>
+              </a:defRPr>
+            </a:pPr>
+            <a:r>
+              <a:t>• Serialized weights in pavement_condition_weights.pt.</a:t>
             </a:r>
           </a:p>
         </p:txBody>
@@ -4630,13 +7844,13 @@
         <p:spPr>
           <a:xfrm>
             <a:off x="0" y="0"/>
-            <a:ext cx="12191695" cy="1097280"/>
+            <a:ext cx="12191695" cy="6858000"/>
           </a:xfrm>
           <a:prstGeom prst="rect">
             <a:avLst/>
           </a:prstGeom>
           <a:solidFill>
-            <a:srgbClr val="0F172A"/>
+            <a:srgbClr val="070D18"/>
           </a:solidFill>
           <a:ln>
             <a:noFill/>
@@ -4672,8 +7886,8 @@
         </p:nvSpPr>
         <p:spPr>
           <a:xfrm>
-            <a:off x="731520" y="137160"/>
-            <a:ext cx="10698480" cy="822960"/>
+            <a:off x="731520" y="365760"/>
+            <a:ext cx="10728655" cy="1005840"/>
           </a:xfrm>
           <a:prstGeom prst="rect">
             <a:avLst/>
@@ -4687,40 +7901,149 @@
           <a:lstStyle/>
           <a:p>
             <a:pPr>
-              <a:defRPr sz="2400" b="1">
-                <a:solidFill>
-                  <a:srgbClr val="FFFFFF"/>
-                </a:solidFill>
-              </a:defRPr>
-            </a:pPr>
-            <a:r>
-              <a:t>7. Conclusion &amp; Future Roadmap</a:t>
-            </a:r>
-          </a:p>
-          <a:p>
-            <a:pPr>
-              <a:defRPr sz="1100">
-                <a:solidFill>
-                  <a:srgbClr val="94A3B8"/>
-                </a:solidFill>
-              </a:defRPr>
-            </a:pPr>
-            <a:r>
-              <a:t>Academic &amp; Industrial AI Project Series  |  Project 34 of 55</a:t>
-            </a:r>
-          </a:p>
-        </p:txBody>
-      </p:sp>
-      <p:sp>
-        <p:nvSpPr>
-          <p:cNvPr id="4" name="TextBox 3"/>
+              <a:defRPr sz="1100" b="1">
+                <a:solidFill>
+                  <a:srgbClr val="F59E0B"/>
+                </a:solidFill>
+              </a:defRPr>
+            </a:pPr>
+            <a:r>
+              <a:t>CIVIL INFRASTRUCTURE COMPUTER VISION • PROJECT-034</a:t>
+            </a:r>
+          </a:p>
+          <a:p>
+            <a:pPr>
+              <a:defRPr sz="2200" b="1">
+                <a:solidFill>
+                  <a:srgbClr val="F8FAFC"/>
+                </a:solidFill>
+              </a:defRPr>
+            </a:pPr>
+            <a:r>
+              <a:t>Road Survey Dashboard &amp; YOLO Bounding Box Canvas</a:t>
+            </a:r>
+          </a:p>
+        </p:txBody>
+      </p:sp>
+      <p:pic>
+        <p:nvPicPr>
+          <p:cNvPr id="4" name="Picture 3" descr="01_dashboard_survey_overview.png"/>
+          <p:cNvPicPr>
+            <a:picLocks noChangeAspect="1"/>
+          </p:cNvPicPr>
+          <p:nvPr/>
+        </p:nvPicPr>
+        <p:blipFill>
+          <a:blip r:embed="rId2"/>
+          <a:stretch>
+            <a:fillRect/>
+          </a:stretch>
+        </p:blipFill>
+        <p:spPr>
+          <a:xfrm>
+            <a:off x="731520" y="1645920"/>
+            <a:ext cx="5120640" cy="4389120"/>
+          </a:xfrm>
+          <a:prstGeom prst="rect">
+            <a:avLst/>
+          </a:prstGeom>
+        </p:spPr>
+      </p:pic>
+      <p:pic>
+        <p:nvPicPr>
+          <p:cNvPr id="5" name="Picture 4" descr="02_yolo_bounding_box_canvas.png"/>
+          <p:cNvPicPr>
+            <a:picLocks noChangeAspect="1"/>
+          </p:cNvPicPr>
+          <p:nvPr/>
+        </p:nvPicPr>
+        <p:blipFill>
+          <a:blip r:embed="rId3"/>
+          <a:stretch>
+            <a:fillRect/>
+          </a:stretch>
+        </p:blipFill>
+        <p:spPr>
+          <a:xfrm>
+            <a:off x="6217920" y="1645920"/>
+            <a:ext cx="5120640" cy="4389120"/>
+          </a:xfrm>
+          <a:prstGeom prst="rect">
+            <a:avLst/>
+          </a:prstGeom>
+        </p:spPr>
+      </p:pic>
+    </p:spTree>
+  </p:cSld>
+  <p:clrMapOvr>
+    <a:masterClrMapping/>
+  </p:clrMapOvr>
+</p:sld>
+</file>
+
+<file path=ppt/slides/slide9.xml><?xml version="1.0" encoding="utf-8"?>
+<p:sld xmlns:a="http://schemas.openxmlformats.org/drawingml/2006/main" xmlns:p="http://schemas.openxmlformats.org/presentationml/2006/main" xmlns:r="http://schemas.openxmlformats.org/officeDocument/2006/relationships">
+  <p:cSld>
+    <p:spTree>
+      <p:nvGrpSpPr>
+        <p:cNvPr id="1" name=""/>
+        <p:cNvGrpSpPr/>
+        <p:nvPr/>
+      </p:nvGrpSpPr>
+      <p:grpSpPr/>
+      <p:sp>
+        <p:nvSpPr>
+          <p:cNvPr id="2" name="Rectangle 1"/>
+          <p:cNvSpPr/>
+          <p:nvPr/>
+        </p:nvSpPr>
+        <p:spPr>
+          <a:xfrm>
+            <a:off x="0" y="0"/>
+            <a:ext cx="12191695" cy="6858000"/>
+          </a:xfrm>
+          <a:prstGeom prst="rect">
+            <a:avLst/>
+          </a:prstGeom>
+          <a:solidFill>
+            <a:srgbClr val="070D18"/>
+          </a:solidFill>
+          <a:ln>
+            <a:noFill/>
+          </a:ln>
+        </p:spPr>
+        <p:style>
+          <a:lnRef idx="1">
+            <a:schemeClr val="accent1"/>
+          </a:lnRef>
+          <a:fillRef idx="3">
+            <a:schemeClr val="accent1"/>
+          </a:fillRef>
+          <a:effectRef idx="2">
+            <a:schemeClr val="accent1"/>
+          </a:effectRef>
+          <a:fontRef idx="minor">
+            <a:schemeClr val="lt1"/>
+          </a:fontRef>
+        </p:style>
+        <p:txBody>
+          <a:bodyPr rtlCol="0" anchor="ctr"/>
+          <a:lstStyle/>
+          <a:p>
+            <a:pPr algn="ctr"/>
+          </a:p>
+        </p:txBody>
+      </p:sp>
+      <p:sp>
+        <p:nvSpPr>
+          <p:cNvPr id="3" name="TextBox 2"/>
           <p:cNvSpPr txBox="1"/>
           <p:nvPr/>
         </p:nvSpPr>
         <p:spPr>
           <a:xfrm>
-            <a:off x="731520" y="1371600"/>
-            <a:ext cx="10698480" cy="5029200"/>
+            <a:off x="731520" y="365760"/>
+            <a:ext cx="10728655" cy="1005840"/>
           </a:xfrm>
           <a:prstGeom prst="rect">
             <a:avLst/>
@@ -4734,87 +8057,78 @@
           <a:lstStyle/>
           <a:p>
             <a:pPr>
-              <a:spcBef>
-                <a:spcPts val="1000"/>
-              </a:spcBef>
-              <a:defRPr sz="1500" b="1">
-                <a:solidFill>
-                  <a:srgbClr val="0F172A"/>
-                </a:solidFill>
-              </a:defRPr>
-            </a:pPr>
-            <a:r>
-              <a:t>■ Project Accomplishments</a:t>
-            </a:r>
-          </a:p>
-          <a:p>
-            <a:pPr>
-              <a:defRPr sz="1300">
-                <a:solidFill>
-                  <a:srgbClr val="475569"/>
-                </a:solidFill>
-              </a:defRPr>
-            </a:pPr>
-            <a:r>
-              <a:t>Engineered a robust, end-to-end prototype validating the initial abstract with reproducible experiments.</a:t>
-            </a:r>
-          </a:p>
-          <a:p>
-            <a:pPr>
-              <a:spcBef>
-                <a:spcPts val="1000"/>
-              </a:spcBef>
-              <a:defRPr sz="1500" b="1">
-                <a:solidFill>
-                  <a:srgbClr val="0F172A"/>
-                </a:solidFill>
-              </a:defRPr>
-            </a:pPr>
-            <a:r>
-              <a:t>■ Industrial Significance</a:t>
-            </a:r>
-          </a:p>
-          <a:p>
-            <a:pPr>
-              <a:defRPr sz="1300">
-                <a:solidFill>
-                  <a:srgbClr val="475569"/>
-                </a:solidFill>
-              </a:defRPr>
-            </a:pPr>
-            <a:r>
-              <a:t>Eliminates latency and manual friction while ensuring high confidence automated decision support.</a:t>
-            </a:r>
-          </a:p>
-          <a:p>
-            <a:pPr>
-              <a:spcBef>
-                <a:spcPts val="1000"/>
-              </a:spcBef>
-              <a:defRPr sz="1500" b="1">
-                <a:solidFill>
-                  <a:srgbClr val="0F172A"/>
-                </a:solidFill>
-              </a:defRPr>
-            </a:pPr>
-            <a:r>
-              <a:t>■ Future Scope &amp; Extensions</a:t>
-            </a:r>
-          </a:p>
-          <a:p>
-            <a:pPr>
-              <a:defRPr sz="1300">
-                <a:solidFill>
-                  <a:srgbClr val="475569"/>
-                </a:solidFill>
-              </a:defRPr>
-            </a:pPr>
-            <a:r>
-              <a:t>Integration with federated edge sensors, distributed multi-tenant cloud clustering, and automated active learning.</a:t>
-            </a:r>
-          </a:p>
-        </p:txBody>
-      </p:sp>
+              <a:defRPr sz="1100" b="1">
+                <a:solidFill>
+                  <a:srgbClr val="F59E0B"/>
+                </a:solidFill>
+              </a:defRPr>
+            </a:pPr>
+            <a:r>
+              <a:t>CIVIL INFRASTRUCTURE COMPUTER VISION • PROJECT-034</a:t>
+            </a:r>
+          </a:p>
+          <a:p>
+            <a:pPr>
+              <a:defRPr sz="2200" b="1">
+                <a:solidFill>
+                  <a:srgbClr val="F8FAFC"/>
+                </a:solidFill>
+              </a:defRPr>
+            </a:pPr>
+            <a:r>
+              <a:t>Corridor Selection &amp; Pavement Condition Index Readout</a:t>
+            </a:r>
+          </a:p>
+        </p:txBody>
+      </p:sp>
+      <p:pic>
+        <p:nvPicPr>
+          <p:cNvPr id="4" name="Picture 3" descr="03_sector_corridor_selection.png"/>
+          <p:cNvPicPr>
+            <a:picLocks noChangeAspect="1"/>
+          </p:cNvPicPr>
+          <p:nvPr/>
+        </p:nvPicPr>
+        <p:blipFill>
+          <a:blip r:embed="rId2"/>
+          <a:stretch>
+            <a:fillRect/>
+          </a:stretch>
+        </p:blipFill>
+        <p:spPr>
+          <a:xfrm>
+            <a:off x="731520" y="1645920"/>
+            <a:ext cx="5120640" cy="4389120"/>
+          </a:xfrm>
+          <a:prstGeom prst="rect">
+            <a:avLst/>
+          </a:prstGeom>
+        </p:spPr>
+      </p:pic>
+      <p:pic>
+        <p:nvPicPr>
+          <p:cNvPr id="5" name="Picture 4" descr="03_sector_corridor_selection.png"/>
+          <p:cNvPicPr>
+            <a:picLocks noChangeAspect="1"/>
+          </p:cNvPicPr>
+          <p:nvPr/>
+        </p:nvPicPr>
+        <p:blipFill>
+          <a:blip r:embed="rId2"/>
+          <a:stretch>
+            <a:fillRect/>
+          </a:stretch>
+        </p:blipFill>
+        <p:spPr>
+          <a:xfrm>
+            <a:off x="6217920" y="1645920"/>
+            <a:ext cx="5120640" cy="4389120"/>
+          </a:xfrm>
+          <a:prstGeom prst="rect">
+            <a:avLst/>
+          </a:prstGeom>
+        </p:spPr>
+      </p:pic>
     </p:spTree>
   </p:cSld>
   <p:clrMapOvr>
